--- a/exports/pptx/lessons/primary-module-05-dot-addition/day-05-add-9-trick.pptx
+++ b/exports/pptx/lessons/primary-module-05-dot-addition/day-05-add-9-trick.pptx
@@ -16,9 +16,13 @@
     <p:sldId id="264" r:id="rId10"/>
     <p:sldId id="265" r:id="rId11"/>
     <p:sldId id="266" r:id="rId12"/>
+    <p:sldId id="267" r:id="rId13"/>
+    <p:sldId id="268" r:id="rId14"/>
+    <p:sldId id="269" r:id="rId15"/>
+    <p:sldId id="270" r:id="rId16"/>
   </p:sldIdLst>
   <p:notesMasterIdLst>
-    <p:notesMasterId r:id="rId13"/>
+    <p:notesMasterId r:id="rId17"/>
   </p:notesMasterIdLst>
   <p:sldSz cx="9144000" cy="5143500"/>
   <p:notesSz cx="5143500" cy="9144000"/>
@@ -712,6 +716,358 @@
             <a:fld id="{F7021451-1387-4CA6-816F-3879F97B5CBC}" type="slidenum">
               <a:rPr lang="en-US"/>
               <a:t>11</a:t>
+            </a:fld>
+            <a:endParaRPr lang="en-US"/>
+          </a:p>
+        </p:txBody>
+      </p:sp>
+    </p:spTree>
+    <p:extLst>
+      <p:ext uri="{BB962C8B-B14F-4D97-AF65-F5344CB8AC3E}">
+        <p14:creationId xmlns:p14="http://schemas.microsoft.com/office/powerpoint/2010/main" val="1024086991"/>
+      </p:ext>
+    </p:extLst>
+  </p:cSld>
+  <p:clrMapOvr>
+    <a:masterClrMapping/>
+  </p:clrMapOvr>
+</p:notes>
+</file>
+
+<file path=ppt/notesSlides/notesSlide12.xml><?xml version="1.0" encoding="utf-8"?>
+<p:notes xmlns:a="http://schemas.openxmlformats.org/drawingml/2006/main" xmlns:r="http://schemas.openxmlformats.org/officeDocument/2006/relationships" xmlns:p="http://schemas.openxmlformats.org/presentationml/2006/main">
+  <p:cSld>
+    <p:spTree>
+      <p:nvGrpSpPr>
+        <p:cNvPr id="1" name=""/>
+        <p:cNvGrpSpPr/>
+        <p:nvPr/>
+      </p:nvGrpSpPr>
+      <p:grpSpPr>
+        <a:xfrm>
+          <a:off x="0" y="0"/>
+          <a:ext cx="0" cy="0"/>
+          <a:chOff x="0" y="0"/>
+          <a:chExt cx="0" cy="0"/>
+        </a:xfrm>
+      </p:grpSpPr>
+      <p:sp>
+        <p:nvSpPr>
+          <p:cNvPr id="2" name="Slide Image Placeholder 1"/>
+          <p:cNvSpPr>
+            <a:spLocks noGrp="1" noRot="1" noChangeAspect="1"/>
+          </p:cNvSpPr>
+          <p:nvPr>
+            <p:ph type="sldImg"/>
+          </p:nvPr>
+        </p:nvSpPr>
+        <p:spPr/>
+      </p:sp>
+      <p:sp>
+        <p:nvSpPr>
+          <p:cNvPr id="3" name="Notes Placeholder 2"/>
+          <p:cNvSpPr>
+            <a:spLocks noGrp="1"/>
+          </p:cNvSpPr>
+          <p:nvPr>
+            <p:ph type="body" idx="1"/>
+          </p:nvPr>
+        </p:nvSpPr>
+        <p:spPr/>
+        <p:txBody>
+          <a:bodyPr/>
+          <a:lstStyle/>
+          <a:p>
+            <a:r>
+              <a:rPr lang="en-US" dirty="0"/>
+              <a:t/>
+            </a:r>
+            <a:endParaRPr lang="en-US" dirty="0"/>
+          </a:p>
+        </p:txBody>
+      </p:sp>
+      <p:sp>
+        <p:nvSpPr>
+          <p:cNvPr id="4" name="Slide Number Placeholder 3"/>
+          <p:cNvSpPr>
+            <a:spLocks noGrp="1"/>
+          </p:cNvSpPr>
+          <p:nvPr>
+            <p:ph type="sldNum" sz="quarter" idx="10"/>
+          </p:nvPr>
+        </p:nvSpPr>
+        <p:spPr/>
+        <p:txBody>
+          <a:bodyPr/>
+          <a:lstStyle/>
+          <a:p>
+            <a:fld id="{F7021451-1387-4CA6-816F-3879F97B5CBC}" type="slidenum">
+              <a:rPr lang="en-US"/>
+              <a:t>12</a:t>
+            </a:fld>
+            <a:endParaRPr lang="en-US"/>
+          </a:p>
+        </p:txBody>
+      </p:sp>
+    </p:spTree>
+    <p:extLst>
+      <p:ext uri="{BB962C8B-B14F-4D97-AF65-F5344CB8AC3E}">
+        <p14:creationId xmlns:p14="http://schemas.microsoft.com/office/powerpoint/2010/main" val="1024086991"/>
+      </p:ext>
+    </p:extLst>
+  </p:cSld>
+  <p:clrMapOvr>
+    <a:masterClrMapping/>
+  </p:clrMapOvr>
+</p:notes>
+</file>
+
+<file path=ppt/notesSlides/notesSlide13.xml><?xml version="1.0" encoding="utf-8"?>
+<p:notes xmlns:a="http://schemas.openxmlformats.org/drawingml/2006/main" xmlns:r="http://schemas.openxmlformats.org/officeDocument/2006/relationships" xmlns:p="http://schemas.openxmlformats.org/presentationml/2006/main">
+  <p:cSld>
+    <p:spTree>
+      <p:nvGrpSpPr>
+        <p:cNvPr id="1" name=""/>
+        <p:cNvGrpSpPr/>
+        <p:nvPr/>
+      </p:nvGrpSpPr>
+      <p:grpSpPr>
+        <a:xfrm>
+          <a:off x="0" y="0"/>
+          <a:ext cx="0" cy="0"/>
+          <a:chOff x="0" y="0"/>
+          <a:chExt cx="0" cy="0"/>
+        </a:xfrm>
+      </p:grpSpPr>
+      <p:sp>
+        <p:nvSpPr>
+          <p:cNvPr id="2" name="Slide Image Placeholder 1"/>
+          <p:cNvSpPr>
+            <a:spLocks noGrp="1" noRot="1" noChangeAspect="1"/>
+          </p:cNvSpPr>
+          <p:nvPr>
+            <p:ph type="sldImg"/>
+          </p:nvPr>
+        </p:nvSpPr>
+        <p:spPr/>
+      </p:sp>
+      <p:sp>
+        <p:nvSpPr>
+          <p:cNvPr id="3" name="Notes Placeholder 2"/>
+          <p:cNvSpPr>
+            <a:spLocks noGrp="1"/>
+          </p:cNvSpPr>
+          <p:nvPr>
+            <p:ph type="body" idx="1"/>
+          </p:nvPr>
+        </p:nvSpPr>
+        <p:spPr/>
+        <p:txBody>
+          <a:bodyPr/>
+          <a:lstStyle/>
+          <a:p>
+            <a:r>
+              <a:rPr lang="en-US" dirty="0"/>
+              <a:t/>
+            </a:r>
+            <a:endParaRPr lang="en-US" dirty="0"/>
+          </a:p>
+        </p:txBody>
+      </p:sp>
+      <p:sp>
+        <p:nvSpPr>
+          <p:cNvPr id="4" name="Slide Number Placeholder 3"/>
+          <p:cNvSpPr>
+            <a:spLocks noGrp="1"/>
+          </p:cNvSpPr>
+          <p:nvPr>
+            <p:ph type="sldNum" sz="quarter" idx="10"/>
+          </p:nvPr>
+        </p:nvSpPr>
+        <p:spPr/>
+        <p:txBody>
+          <a:bodyPr/>
+          <a:lstStyle/>
+          <a:p>
+            <a:fld id="{F7021451-1387-4CA6-816F-3879F97B5CBC}" type="slidenum">
+              <a:rPr lang="en-US"/>
+              <a:t>13</a:t>
+            </a:fld>
+            <a:endParaRPr lang="en-US"/>
+          </a:p>
+        </p:txBody>
+      </p:sp>
+    </p:spTree>
+    <p:extLst>
+      <p:ext uri="{BB962C8B-B14F-4D97-AF65-F5344CB8AC3E}">
+        <p14:creationId xmlns:p14="http://schemas.microsoft.com/office/powerpoint/2010/main" val="1024086991"/>
+      </p:ext>
+    </p:extLst>
+  </p:cSld>
+  <p:clrMapOvr>
+    <a:masterClrMapping/>
+  </p:clrMapOvr>
+</p:notes>
+</file>
+
+<file path=ppt/notesSlides/notesSlide14.xml><?xml version="1.0" encoding="utf-8"?>
+<p:notes xmlns:a="http://schemas.openxmlformats.org/drawingml/2006/main" xmlns:r="http://schemas.openxmlformats.org/officeDocument/2006/relationships" xmlns:p="http://schemas.openxmlformats.org/presentationml/2006/main">
+  <p:cSld>
+    <p:spTree>
+      <p:nvGrpSpPr>
+        <p:cNvPr id="1" name=""/>
+        <p:cNvGrpSpPr/>
+        <p:nvPr/>
+      </p:nvGrpSpPr>
+      <p:grpSpPr>
+        <a:xfrm>
+          <a:off x="0" y="0"/>
+          <a:ext cx="0" cy="0"/>
+          <a:chOff x="0" y="0"/>
+          <a:chExt cx="0" cy="0"/>
+        </a:xfrm>
+      </p:grpSpPr>
+      <p:sp>
+        <p:nvSpPr>
+          <p:cNvPr id="2" name="Slide Image Placeholder 1"/>
+          <p:cNvSpPr>
+            <a:spLocks noGrp="1" noRot="1" noChangeAspect="1"/>
+          </p:cNvSpPr>
+          <p:nvPr>
+            <p:ph type="sldImg"/>
+          </p:nvPr>
+        </p:nvSpPr>
+        <p:spPr/>
+      </p:sp>
+      <p:sp>
+        <p:nvSpPr>
+          <p:cNvPr id="3" name="Notes Placeholder 2"/>
+          <p:cNvSpPr>
+            <a:spLocks noGrp="1"/>
+          </p:cNvSpPr>
+          <p:nvPr>
+            <p:ph type="body" idx="1"/>
+          </p:nvPr>
+        </p:nvSpPr>
+        <p:spPr/>
+        <p:txBody>
+          <a:bodyPr/>
+          <a:lstStyle/>
+          <a:p>
+            <a:r>
+              <a:rPr lang="en-US" dirty="0"/>
+              <a:t/>
+            </a:r>
+            <a:endParaRPr lang="en-US" dirty="0"/>
+          </a:p>
+        </p:txBody>
+      </p:sp>
+      <p:sp>
+        <p:nvSpPr>
+          <p:cNvPr id="4" name="Slide Number Placeholder 3"/>
+          <p:cNvSpPr>
+            <a:spLocks noGrp="1"/>
+          </p:cNvSpPr>
+          <p:nvPr>
+            <p:ph type="sldNum" sz="quarter" idx="10"/>
+          </p:nvPr>
+        </p:nvSpPr>
+        <p:spPr/>
+        <p:txBody>
+          <a:bodyPr/>
+          <a:lstStyle/>
+          <a:p>
+            <a:fld id="{F7021451-1387-4CA6-816F-3879F97B5CBC}" type="slidenum">
+              <a:rPr lang="en-US"/>
+              <a:t>14</a:t>
+            </a:fld>
+            <a:endParaRPr lang="en-US"/>
+          </a:p>
+        </p:txBody>
+      </p:sp>
+    </p:spTree>
+    <p:extLst>
+      <p:ext uri="{BB962C8B-B14F-4D97-AF65-F5344CB8AC3E}">
+        <p14:creationId xmlns:p14="http://schemas.microsoft.com/office/powerpoint/2010/main" val="1024086991"/>
+      </p:ext>
+    </p:extLst>
+  </p:cSld>
+  <p:clrMapOvr>
+    <a:masterClrMapping/>
+  </p:clrMapOvr>
+</p:notes>
+</file>
+
+<file path=ppt/notesSlides/notesSlide15.xml><?xml version="1.0" encoding="utf-8"?>
+<p:notes xmlns:a="http://schemas.openxmlformats.org/drawingml/2006/main" xmlns:r="http://schemas.openxmlformats.org/officeDocument/2006/relationships" xmlns:p="http://schemas.openxmlformats.org/presentationml/2006/main">
+  <p:cSld>
+    <p:spTree>
+      <p:nvGrpSpPr>
+        <p:cNvPr id="1" name=""/>
+        <p:cNvGrpSpPr/>
+        <p:nvPr/>
+      </p:nvGrpSpPr>
+      <p:grpSpPr>
+        <a:xfrm>
+          <a:off x="0" y="0"/>
+          <a:ext cx="0" cy="0"/>
+          <a:chOff x="0" y="0"/>
+          <a:chExt cx="0" cy="0"/>
+        </a:xfrm>
+      </p:grpSpPr>
+      <p:sp>
+        <p:nvSpPr>
+          <p:cNvPr id="2" name="Slide Image Placeholder 1"/>
+          <p:cNvSpPr>
+            <a:spLocks noGrp="1" noRot="1" noChangeAspect="1"/>
+          </p:cNvSpPr>
+          <p:nvPr>
+            <p:ph type="sldImg"/>
+          </p:nvPr>
+        </p:nvSpPr>
+        <p:spPr/>
+      </p:sp>
+      <p:sp>
+        <p:nvSpPr>
+          <p:cNvPr id="3" name="Notes Placeholder 2"/>
+          <p:cNvSpPr>
+            <a:spLocks noGrp="1"/>
+          </p:cNvSpPr>
+          <p:nvPr>
+            <p:ph type="body" idx="1"/>
+          </p:nvPr>
+        </p:nvSpPr>
+        <p:spPr/>
+        <p:txBody>
+          <a:bodyPr/>
+          <a:lstStyle/>
+          <a:p>
+            <a:r>
+              <a:rPr lang="en-US" dirty="0"/>
+              <a:t/>
+            </a:r>
+            <a:endParaRPr lang="en-US" dirty="0"/>
+          </a:p>
+        </p:txBody>
+      </p:sp>
+      <p:sp>
+        <p:nvSpPr>
+          <p:cNvPr id="4" name="Slide Number Placeholder 3"/>
+          <p:cNvSpPr>
+            <a:spLocks noGrp="1"/>
+          </p:cNvSpPr>
+          <p:nvPr>
+            <p:ph type="sldNum" sz="quarter" idx="10"/>
+          </p:nvPr>
+        </p:nvSpPr>
+        <p:spPr/>
+        <p:txBody>
+          <a:bodyPr/>
+          <a:lstStyle/>
+          <a:p>
+            <a:fld id="{F7021451-1387-4CA6-816F-3879F97B5CBC}" type="slidenum">
+              <a:rPr lang="en-US"/>
+              <a:t>15</a:t>
             </a:fld>
             <a:endParaRPr lang="en-US"/>
           </a:p>
@@ -1965,102 +2321,6 @@
         </p:nvSpPr>
         <p:spPr>
           <a:xfrm>
-            <a:off x="406301" y="1223963"/>
-            <a:ext cx="8498026" cy="274290"/>
-          </a:xfrm>
-          <a:prstGeom prst="rect">
-            <a:avLst/>
-          </a:prstGeom>
-          <a:noFill/>
-          <a:ln/>
-        </p:spPr>
-        <p:txBody>
-          <a:bodyPr wrap="square" lIns="0" tIns="0" rIns="0" bIns="0" rtlCol="0" anchor="t"/>
-          <a:lstStyle/>
-          <a:p>
-            <a:pPr algn="l" indent="0" marL="0">
-              <a:lnSpc>
-                <a:spcPts val="2160"/>
-              </a:lnSpc>
-              <a:spcBef>
-                <a:spcPts val="600"/>
-              </a:spcBef>
-              <a:spcAft>
-                <a:spcPts val="800"/>
-              </a:spcAft>
-              <a:buNone/>
-            </a:pPr>
-            <a:r>
-              <a:rPr lang="en-US" sz="1800" b="1" dirty="0">
-                <a:solidFill>
-                  <a:srgbClr val="E07A5F"/>
-                </a:solidFill>
-                <a:latin typeface="Georgia" pitchFamily="34" charset="0"/>
-                <a:ea typeface="Georgia" pitchFamily="34" charset="-122"/>
-                <a:cs typeface="Georgia" pitchFamily="34" charset="-120"/>
-              </a:rPr>
-              <a:t>Goal</a:t>
-            </a:r>
-            <a:endParaRPr lang="en-US" sz="1800" dirty="0"/>
-          </a:p>
-        </p:txBody>
-      </p:sp>
-      <p:sp>
-        <p:nvSpPr>
-          <p:cNvPr id="6" name="Text 4"/>
-          <p:cNvSpPr/>
-          <p:nvPr/>
-        </p:nvSpPr>
-        <p:spPr>
-          <a:xfrm>
-            <a:off x="406301" y="1637854"/>
-            <a:ext cx="8498026" cy="213271"/>
-          </a:xfrm>
-          <a:prstGeom prst="rect">
-            <a:avLst/>
-          </a:prstGeom>
-          <a:noFill/>
-          <a:ln/>
-        </p:spPr>
-        <p:txBody>
-          <a:bodyPr wrap="square" lIns="0" tIns="0" rIns="0" bIns="0" rtlCol="0" anchor="t"/>
-          <a:lstStyle/>
-          <a:p>
-            <a:pPr algn="l" indent="0" marL="0">
-              <a:lnSpc>
-                <a:spcPts val="1680"/>
-              </a:lnSpc>
-              <a:spcBef>
-                <a:spcPts val="300"/>
-              </a:spcBef>
-              <a:spcAft>
-                <a:spcPts val="300"/>
-              </a:spcAft>
-              <a:buNone/>
-            </a:pPr>
-            <a:r>
-              <a:rPr lang="en-US" sz="1200" dirty="0">
-                <a:solidFill>
-                  <a:srgbClr val="2C2C2C"/>
-                </a:solidFill>
-                <a:latin typeface="Verdana" pitchFamily="34" charset="0"/>
-                <a:ea typeface="Verdana" pitchFamily="34" charset="-122"/>
-                <a:cs typeface="Verdana" pitchFamily="34" charset="-120"/>
-              </a:rPr>
-              <a:t>Children add 9 to any 2-digit number using the trick "add 10, take 1 away."</a:t>
-            </a:r>
-            <a:endParaRPr lang="en-US" sz="1200" dirty="0"/>
-          </a:p>
-        </p:txBody>
-      </p:sp>
-      <p:sp>
-        <p:nvSpPr>
-          <p:cNvPr id="7" name="Text 5"/>
-          <p:cNvSpPr/>
-          <p:nvPr/>
-        </p:nvSpPr>
-        <p:spPr>
-          <a:xfrm>
             <a:off x="406301" y="4434929"/>
             <a:ext cx="8498026" cy="213271"/>
           </a:xfrm>
@@ -2205,7 +2465,7 @@
                 <a:ea typeface="Georgia" pitchFamily="34" charset="-122"/>
                 <a:cs typeface="Georgia" pitchFamily="34" charset="-120"/>
               </a:rPr>
-              <a:t>Differentiation</a:t>
+              <a:t>Drill (15 min)</a:t>
             </a:r>
             <a:endParaRPr lang="en-US" sz="1800" dirty="0"/>
           </a:p>
@@ -2219,8 +2479,8 @@
         </p:nvSpPr>
         <p:spPr>
           <a:xfrm>
-            <a:off x="634901" y="883593"/>
-            <a:ext cx="8102798" cy="525661"/>
+            <a:off x="406301" y="870942"/>
+            <a:ext cx="8498026" cy="213271"/>
           </a:xfrm>
           <a:prstGeom prst="rect">
             <a:avLst/>
@@ -2232,18 +2492,20 @@
           <a:bodyPr wrap="square" lIns="0" tIns="0" rIns="0" bIns="0" rtlCol="0" anchor="t"/>
           <a:lstStyle/>
           <a:p>
-            <a:pPr algn="l" marL="342900" indent="-342900">
-              <a:lnSpc>
-                <a:spcPts val="1620"/>
-              </a:lnSpc>
+            <a:pPr algn="l" indent="0" marL="0">
+              <a:lnSpc>
+                <a:spcPts val="1680"/>
+              </a:lnSpc>
+              <a:spcBef>
+                <a:spcPts val="300"/>
+              </a:spcBef>
               <a:spcAft>
                 <a:spcPts val="300"/>
               </a:spcAft>
-              <a:buSzPct val="100000"/>
-              <a:buChar char="•"/>
-            </a:pPr>
-            <a:r>
-              <a:rPr lang="en-US" sz="1200" b="1" dirty="0">
+              <a:buNone/>
+            </a:pPr>
+            <a:r>
+              <a:rPr lang="en-US" sz="1200" dirty="0">
                 <a:solidFill>
                   <a:srgbClr val="2C2C2C"/>
                 </a:solidFill>
@@ -2251,12 +2513,40 @@
                 <a:ea typeface="Verdana" pitchFamily="34" charset="-122"/>
                 <a:cs typeface="Verdana" pitchFamily="34" charset="-120"/>
               </a:rPr>
-              <a:t>Tier up:</a:t>
-            </a:r>
+              <a:t>Worksheet of 20 "+9" problems. Or quick-fire flash cards.</a:t>
+            </a:r>
+            <a:endParaRPr lang="en-US" sz="1200" dirty="0"/>
+          </a:p>
+        </p:txBody>
+      </p:sp>
+      <p:sp>
+        <p:nvSpPr>
+          <p:cNvPr id="5" name="Text 3"/>
+          <p:cNvSpPr/>
+          <p:nvPr/>
+        </p:nvSpPr>
+        <p:spPr>
+          <a:xfrm>
+            <a:off x="406301" y="1160413"/>
+            <a:ext cx="8498026" cy="213271"/>
+          </a:xfrm>
+          <a:prstGeom prst="rect">
+            <a:avLst/>
+          </a:prstGeom>
+          <a:noFill/>
+          <a:ln/>
+        </p:spPr>
+        <p:txBody>
+          <a:bodyPr wrap="square" lIns="0" tIns="0" rIns="0" bIns="0" rtlCol="0" anchor="t"/>
+          <a:lstStyle/>
+          <a:p>
             <a:pPr algn="l" indent="0" marL="0">
               <a:lnSpc>
-                <a:spcPts val="1620"/>
-              </a:lnSpc>
+                <a:spcPts val="1680"/>
+              </a:lnSpc>
+              <a:spcBef>
+                <a:spcPts val="300"/>
+              </a:spcBef>
               <a:spcAft>
                 <a:spcPts val="300"/>
               </a:spcAft>
@@ -2271,59 +2561,15 @@
                 <a:ea typeface="Verdana" pitchFamily="34" charset="-122"/>
                 <a:cs typeface="Verdana" pitchFamily="34" charset="-120"/>
               </a:rPr>
-              <a:t> Try the trick for adding 19 (add 20, take 1 away). 47 + 19 = 66.</a:t>
+              <a:t>After 5 min of individual: paired race — who can do 5 in 30 seconds?</a:t>
             </a:r>
             <a:endParaRPr lang="en-US" sz="1200" dirty="0"/>
           </a:p>
-          <a:p>
-            <a:pPr algn="l" marL="342900" indent="-342900">
-              <a:lnSpc>
-                <a:spcPts val="1620"/>
-              </a:lnSpc>
-              <a:spcAft>
-                <a:spcPts val="300"/>
-              </a:spcAft>
-              <a:buSzPct val="100000"/>
-              <a:buChar char="•"/>
-            </a:pPr>
-            <a:r>
-              <a:rPr lang="en-US" sz="1200" b="1" dirty="0">
-                <a:solidFill>
-                  <a:srgbClr val="2C2C2C"/>
-                </a:solidFill>
-                <a:latin typeface="Verdana" pitchFamily="34" charset="0"/>
-                <a:ea typeface="Verdana" pitchFamily="34" charset="-122"/>
-                <a:cs typeface="Verdana" pitchFamily="34" charset="-120"/>
-              </a:rPr>
-              <a:t>Tier down:</a:t>
-            </a:r>
-            <a:pPr algn="l" indent="0" marL="0">
-              <a:lnSpc>
-                <a:spcPts val="1620"/>
-              </a:lnSpc>
-              <a:spcAft>
-                <a:spcPts val="300"/>
-              </a:spcAft>
-              <a:buNone/>
-            </a:pPr>
-            <a:r>
-              <a:rPr lang="en-US" sz="1200" dirty="0">
-                <a:solidFill>
-                  <a:srgbClr val="2C2C2C"/>
-                </a:solidFill>
-                <a:latin typeface="Verdana" pitchFamily="34" charset="0"/>
-                <a:ea typeface="Verdana" pitchFamily="34" charset="-122"/>
-                <a:cs typeface="Verdana" pitchFamily="34" charset="-120"/>
-              </a:rPr>
-              <a:t> Stick to +9 only. Build up.</a:t>
-            </a:r>
-            <a:endParaRPr lang="en-US" sz="1200" dirty="0"/>
-          </a:p>
-        </p:txBody>
-      </p:sp>
-      <p:sp>
-        <p:nvSpPr>
-          <p:cNvPr id="5" name="Text 3"/>
+        </p:txBody>
+      </p:sp>
+      <p:sp>
+        <p:nvSpPr>
+          <p:cNvPr id="6" name="Text 4"/>
           <p:cNvSpPr/>
           <p:nvPr/>
         </p:nvSpPr>
@@ -2473,7 +2719,7 @@
                 <a:ea typeface="Georgia" pitchFamily="34" charset="-122"/>
                 <a:cs typeface="Georgia" pitchFamily="34" charset="-120"/>
               </a:rPr>
-              <a:t>Teacher's quick notes</a:t>
+              <a:t>Speed round (3 min)</a:t>
             </a:r>
             <a:endParaRPr lang="en-US" sz="1800" dirty="0"/>
           </a:p>
@@ -2488,7 +2734,7 @@
         <p:spPr>
           <a:xfrm>
             <a:off x="406301" y="870942"/>
-            <a:ext cx="8498026" cy="426541"/>
+            <a:ext cx="8498026" cy="213271"/>
           </a:xfrm>
           <a:prstGeom prst="rect">
             <a:avLst/>
@@ -2521,7 +2767,913 @@
                 <a:ea typeface="Verdana" pitchFamily="34" charset="-122"/>
                 <a:cs typeface="Verdana" pitchFamily="34" charset="-120"/>
               </a:rPr>
-              <a:t>– The trick generalises to +99, +999 too — but at this band stay with +9. – Some children will resist: "but I just add!" Honour that — say "you have two tools now, use whichever's faster."</a:t>
+              <a:t>Teacher calls "27 plus 9" — class shouts "36!" Mix it up.</a:t>
+            </a:r>
+            <a:endParaRPr lang="en-US" sz="1200" dirty="0"/>
+          </a:p>
+        </p:txBody>
+      </p:sp>
+      <p:sp>
+        <p:nvSpPr>
+          <p:cNvPr id="5" name="Text 3"/>
+          <p:cNvSpPr/>
+          <p:nvPr/>
+        </p:nvSpPr>
+        <p:spPr>
+          <a:xfrm>
+            <a:off x="406301" y="4434929"/>
+            <a:ext cx="8498026" cy="213271"/>
+          </a:xfrm>
+          <a:prstGeom prst="rect">
+            <a:avLst/>
+          </a:prstGeom>
+          <a:noFill/>
+          <a:ln/>
+        </p:spPr>
+        <p:txBody>
+          <a:bodyPr wrap="square" lIns="0" tIns="0" rIns="0" bIns="0" rtlCol="0" anchor="t"/>
+          <a:lstStyle/>
+          <a:p>
+            <a:pPr algn="l" indent="0" marL="0">
+              <a:lnSpc>
+                <a:spcPts val="1680"/>
+              </a:lnSpc>
+              <a:spcBef>
+                <a:spcPts val="300"/>
+              </a:spcBef>
+              <a:spcAft>
+                <a:spcPts val="300"/>
+              </a:spcAft>
+              <a:buNone/>
+            </a:pPr>
+            <a:r>
+              <a:rPr lang="en-US" sz="1200" dirty="0">
+                <a:solidFill>
+                  <a:srgbClr val="2C2C2C"/>
+                </a:solidFill>
+                <a:latin typeface="Verdana" pitchFamily="34" charset="0"/>
+                <a:ea typeface="Verdana" pitchFamily="34" charset="-122"/>
+                <a:cs typeface="Verdana" pitchFamily="34" charset="-120"/>
+              </a:rPr>
+              <a:t>Primary ·  · IKS Curriculum</a:t>
+            </a:r>
+            <a:endParaRPr lang="en-US" sz="1200" dirty="0"/>
+          </a:p>
+        </p:txBody>
+      </p:sp>
+    </p:spTree>
+  </p:cSld>
+  <p:clrMapOvr>
+    <a:masterClrMapping/>
+  </p:clrMapOvr>
+</p:sld>
+</file>
+
+<file path=ppt/slides/slide12.xml><?xml version="1.0" encoding="utf-8"?>
+<p:sld xmlns:a="http://schemas.openxmlformats.org/drawingml/2006/main" xmlns:r="http://schemas.openxmlformats.org/officeDocument/2006/relationships" xmlns:p="http://schemas.openxmlformats.org/presentationml/2006/main">
+  <p:cSld name="Slide 12">
+    <p:bg>
+      <p:bgPr>
+        <a:solidFill>
+          <a:srgbClr val="FAF7F2"/>
+        </a:solidFill>
+      </p:bgPr>
+    </p:bg>
+    <p:spTree>
+      <p:nvGrpSpPr>
+        <p:cNvPr id="1" name=""/>
+        <p:cNvGrpSpPr/>
+        <p:nvPr/>
+      </p:nvGrpSpPr>
+      <p:grpSpPr>
+        <a:xfrm>
+          <a:off x="0" y="0"/>
+          <a:ext cx="0" cy="0"/>
+          <a:chOff x="0" y="0"/>
+          <a:chExt cx="0" cy="0"/>
+        </a:xfrm>
+      </p:grpSpPr>
+      <p:sp>
+        <p:nvSpPr>
+          <p:cNvPr id="2" name="Text 0"/>
+          <p:cNvSpPr/>
+          <p:nvPr/>
+        </p:nvSpPr>
+        <p:spPr>
+          <a:xfrm>
+            <a:off x="0" y="0"/>
+            <a:ext cx="9144000" cy="101501"/>
+          </a:xfrm>
+          <a:prstGeom prst="rect">
+            <a:avLst/>
+          </a:prstGeom>
+          <a:solidFill>
+            <a:srgbClr val="87A96B"/>
+          </a:solidFill>
+          <a:ln/>
+        </p:spPr>
+        <p:txBody>
+          <a:bodyPr wrap="square" rtlCol="0" anchor="ctr"/>
+          <a:lstStyle/>
+          <a:p>
+            <a:pPr indent="0" marL="0">
+              <a:buNone/>
+            </a:pPr>
+            <a:endParaRPr lang="en-US" dirty="0"/>
+          </a:p>
+        </p:txBody>
+      </p:sp>
+      <p:sp>
+        <p:nvSpPr>
+          <p:cNvPr id="3" name="Text 1"/>
+          <p:cNvSpPr/>
+          <p:nvPr/>
+        </p:nvSpPr>
+        <p:spPr>
+          <a:xfrm>
+            <a:off x="406301" y="457051"/>
+            <a:ext cx="8498026" cy="274290"/>
+          </a:xfrm>
+          <a:prstGeom prst="rect">
+            <a:avLst/>
+          </a:prstGeom>
+          <a:noFill/>
+          <a:ln/>
+        </p:spPr>
+        <p:txBody>
+          <a:bodyPr wrap="square" lIns="0" tIns="0" rIns="0" bIns="0" rtlCol="0" anchor="t"/>
+          <a:lstStyle/>
+          <a:p>
+            <a:pPr algn="l" indent="0" marL="0">
+              <a:lnSpc>
+                <a:spcPts val="2160"/>
+              </a:lnSpc>
+              <a:spcBef>
+                <a:spcPts val="600"/>
+              </a:spcBef>
+              <a:spcAft>
+                <a:spcPts val="800"/>
+              </a:spcAft>
+              <a:buNone/>
+            </a:pPr>
+            <a:r>
+              <a:rPr lang="en-US" sz="1800" b="1" dirty="0">
+                <a:solidFill>
+                  <a:srgbClr val="E07A5F"/>
+                </a:solidFill>
+                <a:latin typeface="Georgia" pitchFamily="34" charset="0"/>
+                <a:ea typeface="Georgia" pitchFamily="34" charset="-122"/>
+                <a:cs typeface="Georgia" pitchFamily="34" charset="-120"/>
+              </a:rPr>
+              <a:t>Show + chant (2 min)</a:t>
+            </a:r>
+            <a:endParaRPr lang="en-US" sz="1800" dirty="0"/>
+          </a:p>
+        </p:txBody>
+      </p:sp>
+      <p:sp>
+        <p:nvSpPr>
+          <p:cNvPr id="4" name="Text 2"/>
+          <p:cNvSpPr/>
+          <p:nvPr/>
+        </p:nvSpPr>
+        <p:spPr>
+          <a:xfrm>
+            <a:off x="406301" y="870942"/>
+            <a:ext cx="8498026" cy="213271"/>
+          </a:xfrm>
+          <a:prstGeom prst="rect">
+            <a:avLst/>
+          </a:prstGeom>
+          <a:noFill/>
+          <a:ln/>
+        </p:spPr>
+        <p:txBody>
+          <a:bodyPr wrap="square" lIns="0" tIns="0" rIns="0" bIns="0" rtlCol="0" anchor="t"/>
+          <a:lstStyle/>
+          <a:p>
+            <a:pPr algn="l" indent="0" marL="0">
+              <a:lnSpc>
+                <a:spcPts val="1680"/>
+              </a:lnSpc>
+              <a:spcBef>
+                <a:spcPts val="300"/>
+              </a:spcBef>
+              <a:spcAft>
+                <a:spcPts val="300"/>
+              </a:spcAft>
+              <a:buNone/>
+            </a:pPr>
+            <a:r>
+              <a:rPr lang="en-US" sz="1200" dirty="0">
+                <a:solidFill>
+                  <a:srgbClr val="2C2C2C"/>
+                </a:solidFill>
+                <a:latin typeface="Verdana" pitchFamily="34" charset="0"/>
+                <a:ea typeface="Verdana" pitchFamily="34" charset="-122"/>
+                <a:cs typeface="Verdana" pitchFamily="34" charset="-120"/>
+              </a:rPr>
+              <a:t>Close.</a:t>
+            </a:r>
+            <a:endParaRPr lang="en-US" sz="1200" dirty="0"/>
+          </a:p>
+        </p:txBody>
+      </p:sp>
+      <p:sp>
+        <p:nvSpPr>
+          <p:cNvPr id="5" name="Text 3"/>
+          <p:cNvSpPr/>
+          <p:nvPr/>
+        </p:nvSpPr>
+        <p:spPr>
+          <a:xfrm>
+            <a:off x="406301" y="4434929"/>
+            <a:ext cx="8498026" cy="213271"/>
+          </a:xfrm>
+          <a:prstGeom prst="rect">
+            <a:avLst/>
+          </a:prstGeom>
+          <a:noFill/>
+          <a:ln/>
+        </p:spPr>
+        <p:txBody>
+          <a:bodyPr wrap="square" lIns="0" tIns="0" rIns="0" bIns="0" rtlCol="0" anchor="t"/>
+          <a:lstStyle/>
+          <a:p>
+            <a:pPr algn="l" indent="0" marL="0">
+              <a:lnSpc>
+                <a:spcPts val="1680"/>
+              </a:lnSpc>
+              <a:spcBef>
+                <a:spcPts val="300"/>
+              </a:spcBef>
+              <a:spcAft>
+                <a:spcPts val="300"/>
+              </a:spcAft>
+              <a:buNone/>
+            </a:pPr>
+            <a:r>
+              <a:rPr lang="en-US" sz="1200" dirty="0">
+                <a:solidFill>
+                  <a:srgbClr val="2C2C2C"/>
+                </a:solidFill>
+                <a:latin typeface="Verdana" pitchFamily="34" charset="0"/>
+                <a:ea typeface="Verdana" pitchFamily="34" charset="-122"/>
+                <a:cs typeface="Verdana" pitchFamily="34" charset="-120"/>
+              </a:rPr>
+              <a:t>Primary ·  · IKS Curriculum</a:t>
+            </a:r>
+            <a:endParaRPr lang="en-US" sz="1200" dirty="0"/>
+          </a:p>
+        </p:txBody>
+      </p:sp>
+    </p:spTree>
+  </p:cSld>
+  <p:clrMapOvr>
+    <a:masterClrMapping/>
+  </p:clrMapOvr>
+</p:sld>
+</file>
+
+<file path=ppt/slides/slide13.xml><?xml version="1.0" encoding="utf-8"?>
+<p:sld xmlns:a="http://schemas.openxmlformats.org/drawingml/2006/main" xmlns:r="http://schemas.openxmlformats.org/officeDocument/2006/relationships" xmlns:p="http://schemas.openxmlformats.org/presentationml/2006/main">
+  <p:cSld name="Slide 13">
+    <p:bg>
+      <p:bgPr>
+        <a:solidFill>
+          <a:srgbClr val="FAF7F2"/>
+        </a:solidFill>
+      </p:bgPr>
+    </p:bg>
+    <p:spTree>
+      <p:nvGrpSpPr>
+        <p:cNvPr id="1" name=""/>
+        <p:cNvGrpSpPr/>
+        <p:nvPr/>
+      </p:nvGrpSpPr>
+      <p:grpSpPr>
+        <a:xfrm>
+          <a:off x="0" y="0"/>
+          <a:ext cx="0" cy="0"/>
+          <a:chOff x="0" y="0"/>
+          <a:chExt cx="0" cy="0"/>
+        </a:xfrm>
+      </p:grpSpPr>
+      <p:sp>
+        <p:nvSpPr>
+          <p:cNvPr id="2" name="Text 0"/>
+          <p:cNvSpPr/>
+          <p:nvPr/>
+        </p:nvSpPr>
+        <p:spPr>
+          <a:xfrm>
+            <a:off x="0" y="0"/>
+            <a:ext cx="9144000" cy="101501"/>
+          </a:xfrm>
+          <a:prstGeom prst="rect">
+            <a:avLst/>
+          </a:prstGeom>
+          <a:solidFill>
+            <a:srgbClr val="87A96B"/>
+          </a:solidFill>
+          <a:ln/>
+        </p:spPr>
+        <p:txBody>
+          <a:bodyPr wrap="square" rtlCol="0" anchor="ctr"/>
+          <a:lstStyle/>
+          <a:p>
+            <a:pPr indent="0" marL="0">
+              <a:buNone/>
+            </a:pPr>
+            <a:endParaRPr lang="en-US" dirty="0"/>
+          </a:p>
+        </p:txBody>
+      </p:sp>
+      <p:sp>
+        <p:nvSpPr>
+          <p:cNvPr id="3" name="Text 1"/>
+          <p:cNvSpPr/>
+          <p:nvPr/>
+        </p:nvSpPr>
+        <p:spPr>
+          <a:xfrm>
+            <a:off x="406301" y="457051"/>
+            <a:ext cx="8498026" cy="274290"/>
+          </a:xfrm>
+          <a:prstGeom prst="rect">
+            <a:avLst/>
+          </a:prstGeom>
+          <a:noFill/>
+          <a:ln/>
+        </p:spPr>
+        <p:txBody>
+          <a:bodyPr wrap="square" lIns="0" tIns="0" rIns="0" bIns="0" rtlCol="0" anchor="t"/>
+          <a:lstStyle/>
+          <a:p>
+            <a:pPr algn="l" indent="0" marL="0">
+              <a:lnSpc>
+                <a:spcPts val="2160"/>
+              </a:lnSpc>
+              <a:spcBef>
+                <a:spcPts val="600"/>
+              </a:spcBef>
+              <a:spcAft>
+                <a:spcPts val="800"/>
+              </a:spcAft>
+              <a:buNone/>
+            </a:pPr>
+            <a:r>
+              <a:rPr lang="en-US" sz="1800" b="1" dirty="0">
+                <a:solidFill>
+                  <a:srgbClr val="E07A5F"/>
+                </a:solidFill>
+                <a:latin typeface="Georgia" pitchFamily="34" charset="0"/>
+                <a:ea typeface="Georgia" pitchFamily="34" charset="-122"/>
+                <a:cs typeface="Georgia" pitchFamily="34" charset="-120"/>
+              </a:rPr>
+              <a:t>Homework</a:t>
+            </a:r>
+            <a:endParaRPr lang="en-US" sz="1800" dirty="0"/>
+          </a:p>
+        </p:txBody>
+      </p:sp>
+      <p:sp>
+        <p:nvSpPr>
+          <p:cNvPr id="4" name="Text 2"/>
+          <p:cNvSpPr/>
+          <p:nvPr/>
+        </p:nvSpPr>
+        <p:spPr>
+          <a:xfrm>
+            <a:off x="634901" y="883593"/>
+            <a:ext cx="8102798" cy="487561"/>
+          </a:xfrm>
+          <a:prstGeom prst="rect">
+            <a:avLst/>
+          </a:prstGeom>
+          <a:noFill/>
+          <a:ln/>
+        </p:spPr>
+        <p:txBody>
+          <a:bodyPr wrap="square" lIns="0" tIns="0" rIns="0" bIns="0" rtlCol="0" anchor="t"/>
+          <a:lstStyle/>
+          <a:p>
+            <a:pPr algn="l" marL="342900" indent="-342900">
+              <a:lnSpc>
+                <a:spcPts val="1620"/>
+              </a:lnSpc>
+              <a:spcAft>
+                <a:spcPts val="300"/>
+              </a:spcAft>
+              <a:buSzPct val="100000"/>
+              <a:buChar char="•"/>
+            </a:pPr>
+            <a:r>
+              <a:rPr lang="en-US" sz="1200" dirty="0">
+                <a:solidFill>
+                  <a:srgbClr val="2C2C2C"/>
+                </a:solidFill>
+                <a:latin typeface="Verdana" pitchFamily="34" charset="0"/>
+                <a:ea typeface="Verdana" pitchFamily="34" charset="-122"/>
+                <a:cs typeface="Verdana" pitchFamily="34" charset="-120"/>
+              </a:rPr>
+              <a:t>Find ANY 5 2-digit numbers (look at your house number, car plate, telephone digits). Add 9 to each in your head.</a:t>
+            </a:r>
+            <a:endParaRPr lang="en-US" sz="1200" dirty="0"/>
+          </a:p>
+        </p:txBody>
+      </p:sp>
+      <p:sp>
+        <p:nvSpPr>
+          <p:cNvPr id="5" name="Text 3"/>
+          <p:cNvSpPr/>
+          <p:nvPr/>
+        </p:nvSpPr>
+        <p:spPr>
+          <a:xfrm>
+            <a:off x="406301" y="4434929"/>
+            <a:ext cx="8498026" cy="213271"/>
+          </a:xfrm>
+          <a:prstGeom prst="rect">
+            <a:avLst/>
+          </a:prstGeom>
+          <a:noFill/>
+          <a:ln/>
+        </p:spPr>
+        <p:txBody>
+          <a:bodyPr wrap="square" lIns="0" tIns="0" rIns="0" bIns="0" rtlCol="0" anchor="t"/>
+          <a:lstStyle/>
+          <a:p>
+            <a:pPr algn="l" indent="0" marL="0">
+              <a:lnSpc>
+                <a:spcPts val="1680"/>
+              </a:lnSpc>
+              <a:spcBef>
+                <a:spcPts val="300"/>
+              </a:spcBef>
+              <a:spcAft>
+                <a:spcPts val="300"/>
+              </a:spcAft>
+              <a:buNone/>
+            </a:pPr>
+            <a:r>
+              <a:rPr lang="en-US" sz="1200" dirty="0">
+                <a:solidFill>
+                  <a:srgbClr val="2C2C2C"/>
+                </a:solidFill>
+                <a:latin typeface="Verdana" pitchFamily="34" charset="0"/>
+                <a:ea typeface="Verdana" pitchFamily="34" charset="-122"/>
+                <a:cs typeface="Verdana" pitchFamily="34" charset="-120"/>
+              </a:rPr>
+              <a:t>Primary ·  · IKS Curriculum</a:t>
+            </a:r>
+            <a:endParaRPr lang="en-US" sz="1200" dirty="0"/>
+          </a:p>
+        </p:txBody>
+      </p:sp>
+    </p:spTree>
+  </p:cSld>
+  <p:clrMapOvr>
+    <a:masterClrMapping/>
+  </p:clrMapOvr>
+</p:sld>
+</file>
+
+<file path=ppt/slides/slide14.xml><?xml version="1.0" encoding="utf-8"?>
+<p:sld xmlns:a="http://schemas.openxmlformats.org/drawingml/2006/main" xmlns:r="http://schemas.openxmlformats.org/officeDocument/2006/relationships" xmlns:p="http://schemas.openxmlformats.org/presentationml/2006/main">
+  <p:cSld name="Slide 14">
+    <p:bg>
+      <p:bgPr>
+        <a:solidFill>
+          <a:srgbClr val="FAF7F2"/>
+        </a:solidFill>
+      </p:bgPr>
+    </p:bg>
+    <p:spTree>
+      <p:nvGrpSpPr>
+        <p:cNvPr id="1" name=""/>
+        <p:cNvGrpSpPr/>
+        <p:nvPr/>
+      </p:nvGrpSpPr>
+      <p:grpSpPr>
+        <a:xfrm>
+          <a:off x="0" y="0"/>
+          <a:ext cx="0" cy="0"/>
+          <a:chOff x="0" y="0"/>
+          <a:chExt cx="0" cy="0"/>
+        </a:xfrm>
+      </p:grpSpPr>
+      <p:sp>
+        <p:nvSpPr>
+          <p:cNvPr id="2" name="Text 0"/>
+          <p:cNvSpPr/>
+          <p:nvPr/>
+        </p:nvSpPr>
+        <p:spPr>
+          <a:xfrm>
+            <a:off x="0" y="0"/>
+            <a:ext cx="9144000" cy="101501"/>
+          </a:xfrm>
+          <a:prstGeom prst="rect">
+            <a:avLst/>
+          </a:prstGeom>
+          <a:solidFill>
+            <a:srgbClr val="87A96B"/>
+          </a:solidFill>
+          <a:ln/>
+        </p:spPr>
+        <p:txBody>
+          <a:bodyPr wrap="square" rtlCol="0" anchor="ctr"/>
+          <a:lstStyle/>
+          <a:p>
+            <a:pPr indent="0" marL="0">
+              <a:buNone/>
+            </a:pPr>
+            <a:endParaRPr lang="en-US" dirty="0"/>
+          </a:p>
+        </p:txBody>
+      </p:sp>
+      <p:sp>
+        <p:nvSpPr>
+          <p:cNvPr id="3" name="Text 1"/>
+          <p:cNvSpPr/>
+          <p:nvPr/>
+        </p:nvSpPr>
+        <p:spPr>
+          <a:xfrm>
+            <a:off x="406301" y="457051"/>
+            <a:ext cx="8498026" cy="274290"/>
+          </a:xfrm>
+          <a:prstGeom prst="rect">
+            <a:avLst/>
+          </a:prstGeom>
+          <a:noFill/>
+          <a:ln/>
+        </p:spPr>
+        <p:txBody>
+          <a:bodyPr wrap="square" lIns="0" tIns="0" rIns="0" bIns="0" rtlCol="0" anchor="t"/>
+          <a:lstStyle/>
+          <a:p>
+            <a:pPr algn="l" indent="0" marL="0">
+              <a:lnSpc>
+                <a:spcPts val="2160"/>
+              </a:lnSpc>
+              <a:spcBef>
+                <a:spcPts val="600"/>
+              </a:spcBef>
+              <a:spcAft>
+                <a:spcPts val="800"/>
+              </a:spcAft>
+              <a:buNone/>
+            </a:pPr>
+            <a:r>
+              <a:rPr lang="en-US" sz="1800" b="1" dirty="0">
+                <a:solidFill>
+                  <a:srgbClr val="E07A5F"/>
+                </a:solidFill>
+                <a:latin typeface="Georgia" pitchFamily="34" charset="0"/>
+                <a:ea typeface="Georgia" pitchFamily="34" charset="-122"/>
+                <a:cs typeface="Georgia" pitchFamily="34" charset="-120"/>
+              </a:rPr>
+              <a:t>Differentiation</a:t>
+            </a:r>
+            <a:endParaRPr lang="en-US" sz="1800" dirty="0"/>
+          </a:p>
+        </p:txBody>
+      </p:sp>
+      <p:sp>
+        <p:nvSpPr>
+          <p:cNvPr id="4" name="Text 2"/>
+          <p:cNvSpPr/>
+          <p:nvPr/>
+        </p:nvSpPr>
+        <p:spPr>
+          <a:xfrm>
+            <a:off x="634901" y="883593"/>
+            <a:ext cx="8102798" cy="525661"/>
+          </a:xfrm>
+          <a:prstGeom prst="rect">
+            <a:avLst/>
+          </a:prstGeom>
+          <a:noFill/>
+          <a:ln/>
+        </p:spPr>
+        <p:txBody>
+          <a:bodyPr wrap="square" lIns="0" tIns="0" rIns="0" bIns="0" rtlCol="0" anchor="t"/>
+          <a:lstStyle/>
+          <a:p>
+            <a:pPr algn="l" marL="342900" indent="-342900">
+              <a:lnSpc>
+                <a:spcPts val="1620"/>
+              </a:lnSpc>
+              <a:spcAft>
+                <a:spcPts val="300"/>
+              </a:spcAft>
+              <a:buSzPct val="100000"/>
+              <a:buChar char="•"/>
+            </a:pPr>
+            <a:r>
+              <a:rPr lang="en-US" sz="1200" b="1" dirty="0">
+                <a:solidFill>
+                  <a:srgbClr val="2C2C2C"/>
+                </a:solidFill>
+                <a:latin typeface="Verdana" pitchFamily="34" charset="0"/>
+                <a:ea typeface="Verdana" pitchFamily="34" charset="-122"/>
+                <a:cs typeface="Verdana" pitchFamily="34" charset="-120"/>
+              </a:rPr>
+              <a:t>Tier up:</a:t>
+            </a:r>
+            <a:pPr algn="l" indent="0" marL="0">
+              <a:lnSpc>
+                <a:spcPts val="1620"/>
+              </a:lnSpc>
+              <a:spcAft>
+                <a:spcPts val="300"/>
+              </a:spcAft>
+              <a:buNone/>
+            </a:pPr>
+            <a:r>
+              <a:rPr lang="en-US" sz="1200" dirty="0">
+                <a:solidFill>
+                  <a:srgbClr val="2C2C2C"/>
+                </a:solidFill>
+                <a:latin typeface="Verdana" pitchFamily="34" charset="0"/>
+                <a:ea typeface="Verdana" pitchFamily="34" charset="-122"/>
+                <a:cs typeface="Verdana" pitchFamily="34" charset="-120"/>
+              </a:rPr>
+              <a:t> Try the trick for adding 19 (add 20, take 1 away). 47 + 19 = 66.</a:t>
+            </a:r>
+            <a:endParaRPr lang="en-US" sz="1200" dirty="0"/>
+          </a:p>
+          <a:p>
+            <a:pPr algn="l" marL="342900" indent="-342900">
+              <a:lnSpc>
+                <a:spcPts val="1620"/>
+              </a:lnSpc>
+              <a:spcAft>
+                <a:spcPts val="300"/>
+              </a:spcAft>
+              <a:buSzPct val="100000"/>
+              <a:buChar char="•"/>
+            </a:pPr>
+            <a:r>
+              <a:rPr lang="en-US" sz="1200" b="1" dirty="0">
+                <a:solidFill>
+                  <a:srgbClr val="2C2C2C"/>
+                </a:solidFill>
+                <a:latin typeface="Verdana" pitchFamily="34" charset="0"/>
+                <a:ea typeface="Verdana" pitchFamily="34" charset="-122"/>
+                <a:cs typeface="Verdana" pitchFamily="34" charset="-120"/>
+              </a:rPr>
+              <a:t>Tier down:</a:t>
+            </a:r>
+            <a:pPr algn="l" indent="0" marL="0">
+              <a:lnSpc>
+                <a:spcPts val="1620"/>
+              </a:lnSpc>
+              <a:spcAft>
+                <a:spcPts val="300"/>
+              </a:spcAft>
+              <a:buNone/>
+            </a:pPr>
+            <a:r>
+              <a:rPr lang="en-US" sz="1200" dirty="0">
+                <a:solidFill>
+                  <a:srgbClr val="2C2C2C"/>
+                </a:solidFill>
+                <a:latin typeface="Verdana" pitchFamily="34" charset="0"/>
+                <a:ea typeface="Verdana" pitchFamily="34" charset="-122"/>
+                <a:cs typeface="Verdana" pitchFamily="34" charset="-120"/>
+              </a:rPr>
+              <a:t> Stick to +9 only. Build up.</a:t>
+            </a:r>
+            <a:endParaRPr lang="en-US" sz="1200" dirty="0"/>
+          </a:p>
+        </p:txBody>
+      </p:sp>
+      <p:sp>
+        <p:nvSpPr>
+          <p:cNvPr id="5" name="Text 3"/>
+          <p:cNvSpPr/>
+          <p:nvPr/>
+        </p:nvSpPr>
+        <p:spPr>
+          <a:xfrm>
+            <a:off x="406301" y="4434929"/>
+            <a:ext cx="8498026" cy="213271"/>
+          </a:xfrm>
+          <a:prstGeom prst="rect">
+            <a:avLst/>
+          </a:prstGeom>
+          <a:noFill/>
+          <a:ln/>
+        </p:spPr>
+        <p:txBody>
+          <a:bodyPr wrap="square" lIns="0" tIns="0" rIns="0" bIns="0" rtlCol="0" anchor="t"/>
+          <a:lstStyle/>
+          <a:p>
+            <a:pPr algn="l" indent="0" marL="0">
+              <a:lnSpc>
+                <a:spcPts val="1680"/>
+              </a:lnSpc>
+              <a:spcBef>
+                <a:spcPts val="300"/>
+              </a:spcBef>
+              <a:spcAft>
+                <a:spcPts val="300"/>
+              </a:spcAft>
+              <a:buNone/>
+            </a:pPr>
+            <a:r>
+              <a:rPr lang="en-US" sz="1200" dirty="0">
+                <a:solidFill>
+                  <a:srgbClr val="2C2C2C"/>
+                </a:solidFill>
+                <a:latin typeface="Verdana" pitchFamily="34" charset="0"/>
+                <a:ea typeface="Verdana" pitchFamily="34" charset="-122"/>
+                <a:cs typeface="Verdana" pitchFamily="34" charset="-120"/>
+              </a:rPr>
+              <a:t>Primary ·  · IKS Curriculum</a:t>
+            </a:r>
+            <a:endParaRPr lang="en-US" sz="1200" dirty="0"/>
+          </a:p>
+        </p:txBody>
+      </p:sp>
+    </p:spTree>
+  </p:cSld>
+  <p:clrMapOvr>
+    <a:masterClrMapping/>
+  </p:clrMapOvr>
+</p:sld>
+</file>
+
+<file path=ppt/slides/slide15.xml><?xml version="1.0" encoding="utf-8"?>
+<p:sld xmlns:a="http://schemas.openxmlformats.org/drawingml/2006/main" xmlns:r="http://schemas.openxmlformats.org/officeDocument/2006/relationships" xmlns:p="http://schemas.openxmlformats.org/presentationml/2006/main">
+  <p:cSld name="Slide 15">
+    <p:bg>
+      <p:bgPr>
+        <a:solidFill>
+          <a:srgbClr val="FAF7F2"/>
+        </a:solidFill>
+      </p:bgPr>
+    </p:bg>
+    <p:spTree>
+      <p:nvGrpSpPr>
+        <p:cNvPr id="1" name=""/>
+        <p:cNvGrpSpPr/>
+        <p:nvPr/>
+      </p:nvGrpSpPr>
+      <p:grpSpPr>
+        <a:xfrm>
+          <a:off x="0" y="0"/>
+          <a:ext cx="0" cy="0"/>
+          <a:chOff x="0" y="0"/>
+          <a:chExt cx="0" cy="0"/>
+        </a:xfrm>
+      </p:grpSpPr>
+      <p:sp>
+        <p:nvSpPr>
+          <p:cNvPr id="2" name="Text 0"/>
+          <p:cNvSpPr/>
+          <p:nvPr/>
+        </p:nvSpPr>
+        <p:spPr>
+          <a:xfrm>
+            <a:off x="0" y="0"/>
+            <a:ext cx="9144000" cy="101501"/>
+          </a:xfrm>
+          <a:prstGeom prst="rect">
+            <a:avLst/>
+          </a:prstGeom>
+          <a:solidFill>
+            <a:srgbClr val="87A96B"/>
+          </a:solidFill>
+          <a:ln/>
+        </p:spPr>
+        <p:txBody>
+          <a:bodyPr wrap="square" rtlCol="0" anchor="ctr"/>
+          <a:lstStyle/>
+          <a:p>
+            <a:pPr indent="0" marL="0">
+              <a:buNone/>
+            </a:pPr>
+            <a:endParaRPr lang="en-US" dirty="0"/>
+          </a:p>
+        </p:txBody>
+      </p:sp>
+      <p:sp>
+        <p:nvSpPr>
+          <p:cNvPr id="3" name="Text 1"/>
+          <p:cNvSpPr/>
+          <p:nvPr/>
+        </p:nvSpPr>
+        <p:spPr>
+          <a:xfrm>
+            <a:off x="406301" y="457051"/>
+            <a:ext cx="8498026" cy="274290"/>
+          </a:xfrm>
+          <a:prstGeom prst="rect">
+            <a:avLst/>
+          </a:prstGeom>
+          <a:noFill/>
+          <a:ln/>
+        </p:spPr>
+        <p:txBody>
+          <a:bodyPr wrap="square" lIns="0" tIns="0" rIns="0" bIns="0" rtlCol="0" anchor="t"/>
+          <a:lstStyle/>
+          <a:p>
+            <a:pPr algn="l" indent="0" marL="0">
+              <a:lnSpc>
+                <a:spcPts val="2160"/>
+              </a:lnSpc>
+              <a:spcBef>
+                <a:spcPts val="600"/>
+              </a:spcBef>
+              <a:spcAft>
+                <a:spcPts val="800"/>
+              </a:spcAft>
+              <a:buNone/>
+            </a:pPr>
+            <a:r>
+              <a:rPr lang="en-US" sz="1800" b="1" dirty="0">
+                <a:solidFill>
+                  <a:srgbClr val="E07A5F"/>
+                </a:solidFill>
+                <a:latin typeface="Georgia" pitchFamily="34" charset="0"/>
+                <a:ea typeface="Georgia" pitchFamily="34" charset="-122"/>
+                <a:cs typeface="Georgia" pitchFamily="34" charset="-120"/>
+              </a:rPr>
+              <a:t>Teacher's quick notes</a:t>
+            </a:r>
+            <a:endParaRPr lang="en-US" sz="1800" dirty="0"/>
+          </a:p>
+        </p:txBody>
+      </p:sp>
+      <p:sp>
+        <p:nvSpPr>
+          <p:cNvPr id="4" name="Text 2"/>
+          <p:cNvSpPr/>
+          <p:nvPr/>
+        </p:nvSpPr>
+        <p:spPr>
+          <a:xfrm>
+            <a:off x="634901" y="883593"/>
+            <a:ext cx="8102798" cy="731341"/>
+          </a:xfrm>
+          <a:prstGeom prst="rect">
+            <a:avLst/>
+          </a:prstGeom>
+          <a:noFill/>
+          <a:ln/>
+        </p:spPr>
+        <p:txBody>
+          <a:bodyPr wrap="square" lIns="0" tIns="0" rIns="0" bIns="0" rtlCol="0" anchor="t"/>
+          <a:lstStyle/>
+          <a:p>
+            <a:pPr algn="l" marL="342900" indent="-342900">
+              <a:lnSpc>
+                <a:spcPts val="1620"/>
+              </a:lnSpc>
+              <a:spcAft>
+                <a:spcPts val="300"/>
+              </a:spcAft>
+              <a:buSzPct val="100000"/>
+              <a:buChar char="•"/>
+            </a:pPr>
+            <a:r>
+              <a:rPr lang="en-US" sz="1200" dirty="0">
+                <a:solidFill>
+                  <a:srgbClr val="2C2C2C"/>
+                </a:solidFill>
+                <a:latin typeface="Verdana" pitchFamily="34" charset="0"/>
+                <a:ea typeface="Verdana" pitchFamily="34" charset="-122"/>
+                <a:cs typeface="Verdana" pitchFamily="34" charset="-120"/>
+              </a:rPr>
+              <a:t>The trick generalises to +99, +999 too — but at this band stay with +9.</a:t>
+            </a:r>
+            <a:endParaRPr lang="en-US" sz="1200" dirty="0"/>
+          </a:p>
+          <a:p>
+            <a:pPr algn="l" marL="342900" indent="-342900">
+              <a:lnSpc>
+                <a:spcPts val="1620"/>
+              </a:lnSpc>
+              <a:spcAft>
+                <a:spcPts val="300"/>
+              </a:spcAft>
+              <a:buSzPct val="100000"/>
+              <a:buChar char="•"/>
+            </a:pPr>
+            <a:r>
+              <a:rPr lang="en-US" sz="1200" dirty="0">
+                <a:solidFill>
+                  <a:srgbClr val="2C2C2C"/>
+                </a:solidFill>
+                <a:latin typeface="Verdana" pitchFamily="34" charset="0"/>
+                <a:ea typeface="Verdana" pitchFamily="34" charset="-122"/>
+                <a:cs typeface="Verdana" pitchFamily="34" charset="-120"/>
+              </a:rPr>
+              <a:t>Some children will resist: "but I just add!" Honour that — say "you have two tools now, use whichever's faster."</a:t>
             </a:r>
             <a:endParaRPr lang="en-US" sz="1200" dirty="0"/>
           </a:p>
@@ -2679,7 +3831,7 @@
                 <a:ea typeface="Georgia" pitchFamily="34" charset="-122"/>
                 <a:cs typeface="Georgia" pitchFamily="34" charset="-120"/>
               </a:rPr>
-              <a:t>Materials</a:t>
+              <a:t>Goal</a:t>
             </a:r>
             <a:endParaRPr lang="en-US" sz="1800" dirty="0"/>
           </a:p>
@@ -2727,7 +3879,7 @@
                 <a:ea typeface="Verdana" pitchFamily="34" charset="-122"/>
                 <a:cs typeface="Verdana" pitchFamily="34" charset="-120"/>
               </a:rPr>
-              <a:t>– Whiteboard</a:t>
+              <a:t>Children add 9 to any 2-digit number using the trick "add 10, take 1 away."</a:t>
             </a:r>
             <a:endParaRPr lang="en-US" sz="1200" dirty="0"/>
           </a:p>
@@ -2736,100 +3888,6 @@
       <p:sp>
         <p:nvSpPr>
           <p:cNvPr id="5" name="Text 3"/>
-          <p:cNvSpPr/>
-          <p:nvPr/>
-        </p:nvSpPr>
-        <p:spPr>
-          <a:xfrm>
-            <a:off x="634901" y="1173063"/>
-            <a:ext cx="8102798" cy="281880"/>
-          </a:xfrm>
-          <a:prstGeom prst="rect">
-            <a:avLst/>
-          </a:prstGeom>
-          <a:noFill/>
-          <a:ln/>
-        </p:spPr>
-        <p:txBody>
-          <a:bodyPr wrap="square" lIns="0" tIns="0" rIns="0" bIns="0" rtlCol="0" anchor="t"/>
-          <a:lstStyle/>
-          <a:p>
-            <a:pPr algn="l" marL="342900" indent="-342900">
-              <a:lnSpc>
-                <a:spcPts val="1620"/>
-              </a:lnSpc>
-              <a:spcAft>
-                <a:spcPts val="300"/>
-              </a:spcAft>
-              <a:buSzPct val="100000"/>
-              <a:buChar char="•"/>
-            </a:pPr>
-            <a:r>
-              <a:rPr lang="en-US" sz="1200" dirty="0">
-                <a:solidFill>
-                  <a:srgbClr val="2C2C2C"/>
-                </a:solidFill>
-                <a:latin typeface="Verdana" pitchFamily="34" charset="0"/>
-                <a:ea typeface="Verdana" pitchFamily="34" charset="-122"/>
-                <a:cs typeface="Verdana" pitchFamily="34" charset="-120"/>
-              </a:rPr>
-              <a:t>"Add 9" drill sheet</a:t>
-            </a:r>
-            <a:endParaRPr lang="en-US" sz="1200" dirty="0"/>
-          </a:p>
-        </p:txBody>
-      </p:sp>
-      <p:sp>
-        <p:nvSpPr>
-          <p:cNvPr id="6" name="Text 4"/>
-          <p:cNvSpPr/>
-          <p:nvPr/>
-        </p:nvSpPr>
-        <p:spPr>
-          <a:xfrm>
-            <a:off x="406301" y="1543794"/>
-            <a:ext cx="8498026" cy="213271"/>
-          </a:xfrm>
-          <a:prstGeom prst="rect">
-            <a:avLst/>
-          </a:prstGeom>
-          <a:noFill/>
-          <a:ln/>
-        </p:spPr>
-        <p:txBody>
-          <a:bodyPr wrap="square" lIns="0" tIns="0" rIns="0" bIns="0" rtlCol="0" anchor="t"/>
-          <a:lstStyle/>
-          <a:p>
-            <a:pPr algn="l" indent="0" marL="0">
-              <a:lnSpc>
-                <a:spcPts val="1680"/>
-              </a:lnSpc>
-              <a:spcBef>
-                <a:spcPts val="300"/>
-              </a:spcBef>
-              <a:spcAft>
-                <a:spcPts val="300"/>
-              </a:spcAft>
-              <a:buNone/>
-            </a:pPr>
-            <a:r>
-              <a:rPr lang="en-US" sz="1200" dirty="0">
-                <a:solidFill>
-                  <a:srgbClr val="2C2C2C"/>
-                </a:solidFill>
-                <a:latin typeface="Verdana" pitchFamily="34" charset="0"/>
-                <a:ea typeface="Verdana" pitchFamily="34" charset="-122"/>
-                <a:cs typeface="Verdana" pitchFamily="34" charset="-120"/>
-              </a:rPr>
-              <a:t>– Quick-fire flash cards</a:t>
-            </a:r>
-            <a:endParaRPr lang="en-US" sz="1200" dirty="0"/>
-          </a:p>
-        </p:txBody>
-      </p:sp>
-      <p:sp>
-        <p:nvSpPr>
-          <p:cNvPr id="7" name="Text 5"/>
           <p:cNvSpPr/>
           <p:nvPr/>
         </p:nvSpPr>
@@ -2979,7 +4037,7 @@
                 <a:ea typeface="Georgia" pitchFamily="34" charset="-122"/>
                 <a:cs typeface="Georgia" pitchFamily="34" charset="-120"/>
               </a:rPr>
-              <a:t>The flow</a:t>
+              <a:t>Materials</a:t>
             </a:r>
             <a:endParaRPr lang="en-US" sz="1800" dirty="0"/>
           </a:p>
@@ -2988,6 +4046,100 @@
       <p:sp>
         <p:nvSpPr>
           <p:cNvPr id="4" name="Text 2"/>
+          <p:cNvSpPr/>
+          <p:nvPr/>
+        </p:nvSpPr>
+        <p:spPr>
+          <a:xfrm>
+            <a:off x="634901" y="883593"/>
+            <a:ext cx="8102798" cy="769441"/>
+          </a:xfrm>
+          <a:prstGeom prst="rect">
+            <a:avLst/>
+          </a:prstGeom>
+          <a:noFill/>
+          <a:ln/>
+        </p:spPr>
+        <p:txBody>
+          <a:bodyPr wrap="square" lIns="0" tIns="0" rIns="0" bIns="0" rtlCol="0" anchor="t"/>
+          <a:lstStyle/>
+          <a:p>
+            <a:pPr algn="l" marL="342900" indent="-342900">
+              <a:lnSpc>
+                <a:spcPts val="1620"/>
+              </a:lnSpc>
+              <a:spcAft>
+                <a:spcPts val="300"/>
+              </a:spcAft>
+              <a:buSzPct val="100000"/>
+              <a:buChar char="•"/>
+            </a:pPr>
+            <a:r>
+              <a:rPr lang="en-US" sz="1200" dirty="0">
+                <a:solidFill>
+                  <a:srgbClr val="2C2C2C"/>
+                </a:solidFill>
+                <a:latin typeface="Verdana" pitchFamily="34" charset="0"/>
+                <a:ea typeface="Verdana" pitchFamily="34" charset="-122"/>
+                <a:cs typeface="Verdana" pitchFamily="34" charset="-120"/>
+              </a:rPr>
+              <a:t>Whiteboard</a:t>
+            </a:r>
+            <a:endParaRPr lang="en-US" sz="1200" dirty="0"/>
+          </a:p>
+          <a:p>
+            <a:pPr algn="l" marL="342900" indent="-342900">
+              <a:lnSpc>
+                <a:spcPts val="1620"/>
+              </a:lnSpc>
+              <a:spcAft>
+                <a:spcPts val="300"/>
+              </a:spcAft>
+              <a:buSzPct val="100000"/>
+              <a:buChar char="•"/>
+            </a:pPr>
+            <a:r>
+              <a:rPr lang="en-US" sz="1200" dirty="0">
+                <a:solidFill>
+                  <a:srgbClr val="2C2C2C"/>
+                </a:solidFill>
+                <a:latin typeface="Verdana" pitchFamily="34" charset="0"/>
+                <a:ea typeface="Verdana" pitchFamily="34" charset="-122"/>
+                <a:cs typeface="Verdana" pitchFamily="34" charset="-120"/>
+              </a:rPr>
+              <a:t>"Add 9" drill sheet</a:t>
+            </a:r>
+            <a:endParaRPr lang="en-US" sz="1200" dirty="0"/>
+          </a:p>
+          <a:p>
+            <a:pPr algn="l" marL="342900" indent="-342900">
+              <a:lnSpc>
+                <a:spcPts val="1620"/>
+              </a:lnSpc>
+              <a:spcAft>
+                <a:spcPts val="300"/>
+              </a:spcAft>
+              <a:buSzPct val="100000"/>
+              <a:buChar char="•"/>
+            </a:pPr>
+            <a:r>
+              <a:rPr lang="en-US" sz="1200" dirty="0">
+                <a:solidFill>
+                  <a:srgbClr val="2C2C2C"/>
+                </a:solidFill>
+                <a:latin typeface="Verdana" pitchFamily="34" charset="0"/>
+                <a:ea typeface="Verdana" pitchFamily="34" charset="-122"/>
+                <a:cs typeface="Verdana" pitchFamily="34" charset="-120"/>
+              </a:rPr>
+              <a:t>Quick-fire flash cards</a:t>
+            </a:r>
+            <a:endParaRPr lang="en-US" sz="1200" dirty="0"/>
+          </a:p>
+        </p:txBody>
+      </p:sp>
+      <p:sp>
+        <p:nvSpPr>
+          <p:cNvPr id="5" name="Text 3"/>
           <p:cNvSpPr/>
           <p:nvPr/>
         </p:nvSpPr>
@@ -3137,7 +4289,7 @@
                 <a:ea typeface="Georgia" pitchFamily="34" charset="-122"/>
                 <a:cs typeface="Georgia" pitchFamily="34" charset="-120"/>
               </a:rPr>
-              <a:t>Settle + chant (5 min)</a:t>
+              <a:t>The flow</a:t>
             </a:r>
             <a:endParaRPr lang="en-US" sz="1800" dirty="0"/>
           </a:p>
@@ -3295,7 +4447,7 @@
                 <a:ea typeface="Georgia" pitchFamily="34" charset="-122"/>
                 <a:cs typeface="Georgia" pitchFamily="34" charset="-120"/>
               </a:rPr>
-              <a:t>Story / trick (10 min)</a:t>
+              <a:t>Settle + chant (5 min)</a:t>
             </a:r>
             <a:endParaRPr lang="en-US" sz="1800" dirty="0"/>
           </a:p>
@@ -3304,598 +4456,6 @@
       <p:sp>
         <p:nvSpPr>
           <p:cNvPr id="4" name="Text 2"/>
-          <p:cNvSpPr/>
-          <p:nvPr/>
-        </p:nvSpPr>
-        <p:spPr>
-          <a:xfrm>
-            <a:off x="406301" y="870942"/>
-            <a:ext cx="8498026" cy="213271"/>
-          </a:xfrm>
-          <a:prstGeom prst="rect">
-            <a:avLst/>
-          </a:prstGeom>
-          <a:noFill/>
-          <a:ln/>
-        </p:spPr>
-        <p:txBody>
-          <a:bodyPr wrap="square" lIns="0" tIns="0" rIns="0" bIns="0" rtlCol="0" anchor="t"/>
-          <a:lstStyle/>
-          <a:p>
-            <a:pPr algn="l" indent="0" marL="0">
-              <a:lnSpc>
-                <a:spcPts val="1680"/>
-              </a:lnSpc>
-              <a:spcBef>
-                <a:spcPts val="300"/>
-              </a:spcBef>
-              <a:spcAft>
-                <a:spcPts val="300"/>
-              </a:spcAft>
-              <a:buNone/>
-            </a:pPr>
-            <a:r>
-              <a:rPr lang="en-US" sz="1200" dirty="0">
-                <a:solidFill>
-                  <a:srgbClr val="2C2C2C"/>
-                </a:solidFill>
-                <a:latin typeface="Verdana" pitchFamily="34" charset="0"/>
-                <a:ea typeface="Verdana" pitchFamily="34" charset="-122"/>
-                <a:cs typeface="Verdana" pitchFamily="34" charset="-120"/>
-              </a:rPr>
-              <a:t>– Write on the board:</a:t>
-            </a:r>
-            <a:endParaRPr lang="en-US" sz="1200" dirty="0"/>
-          </a:p>
-        </p:txBody>
-      </p:sp>
-      <p:sp>
-        <p:nvSpPr>
-          <p:cNvPr id="5" name="Text 3"/>
-          <p:cNvSpPr/>
-          <p:nvPr/>
-        </p:nvSpPr>
-        <p:spPr>
-          <a:xfrm>
-            <a:off x="406301" y="1173063"/>
-            <a:ext cx="8331398" cy="428476"/>
-          </a:xfrm>
-          <a:prstGeom prst="rect">
-            <a:avLst/>
-          </a:prstGeom>
-          <a:solidFill>
-            <a:srgbClr val="FFFFFF"/>
-          </a:solidFill>
-          <a:ln/>
-        </p:spPr>
-        <p:txBody>
-          <a:bodyPr wrap="square" rtlCol="0" anchor="ctr"/>
-          <a:lstStyle/>
-          <a:p>
-            <a:pPr indent="0" marL="0">
-              <a:buNone/>
-            </a:pPr>
-            <a:endParaRPr lang="en-US" dirty="0"/>
-          </a:p>
-        </p:txBody>
-      </p:sp>
-      <p:sp>
-        <p:nvSpPr>
-          <p:cNvPr id="6" name="Shape 4"/>
-          <p:cNvSpPr/>
-          <p:nvPr/>
-        </p:nvSpPr>
-        <p:spPr>
-          <a:xfrm>
-            <a:off x="430113" y="1173063"/>
-            <a:ext cx="0" cy="428476"/>
-          </a:xfrm>
-          <a:prstGeom prst="line">
-            <a:avLst/>
-          </a:prstGeom>
-          <a:noFill/>
-          <a:ln w="47625">
-            <a:solidFill>
-              <a:srgbClr val="87A96B"/>
-            </a:solidFill>
-            <a:prstDash val="solid"/>
-          </a:ln>
-        </p:spPr>
-      </p:sp>
-      <p:sp>
-        <p:nvSpPr>
-          <p:cNvPr id="7" name="Text 5"/>
-          <p:cNvSpPr/>
-          <p:nvPr/>
-        </p:nvSpPr>
-        <p:spPr>
-          <a:xfrm>
-            <a:off x="631627" y="1300014"/>
-            <a:ext cx="8086939" cy="174575"/>
-          </a:xfrm>
-          <a:prstGeom prst="rect">
-            <a:avLst/>
-          </a:prstGeom>
-          <a:noFill/>
-          <a:ln/>
-        </p:spPr>
-        <p:txBody>
-          <a:bodyPr wrap="square" lIns="0" tIns="0" rIns="0" bIns="0" rtlCol="0" anchor="t"/>
-          <a:lstStyle/>
-          <a:p>
-            <a:pPr algn="l" indent="0" marL="0">
-              <a:lnSpc>
-                <a:spcPts val="1375"/>
-              </a:lnSpc>
-              <a:buNone/>
-            </a:pPr>
-            <a:r>
-              <a:rPr lang="en-US" sz="1100" dirty="0">
-                <a:solidFill>
-                  <a:srgbClr val="2C2C2C"/>
-                </a:solidFill>
-                <a:latin typeface="Courier New" pitchFamily="34" charset="0"/>
-                <a:ea typeface="Courier New" pitchFamily="34" charset="-122"/>
-                <a:cs typeface="Courier New" pitchFamily="34" charset="-120"/>
-              </a:rPr>
-              <a:t>33 + 9 = ?</a:t>
-            </a:r>
-            <a:endParaRPr lang="en-US" sz="1100" dirty="0"/>
-          </a:p>
-        </p:txBody>
-      </p:sp>
-      <p:sp>
-        <p:nvSpPr>
-          <p:cNvPr id="8" name="Text 6"/>
-          <p:cNvSpPr/>
-          <p:nvPr/>
-        </p:nvSpPr>
-        <p:spPr>
-          <a:xfrm>
-            <a:off x="634901" y="1703040"/>
-            <a:ext cx="8102798" cy="525661"/>
-          </a:xfrm>
-          <a:prstGeom prst="rect">
-            <a:avLst/>
-          </a:prstGeom>
-          <a:noFill/>
-          <a:ln/>
-        </p:spPr>
-        <p:txBody>
-          <a:bodyPr wrap="square" lIns="0" tIns="0" rIns="0" bIns="0" rtlCol="0" anchor="t"/>
-          <a:lstStyle/>
-          <a:p>
-            <a:pPr algn="l" marL="342900" indent="-342900">
-              <a:lnSpc>
-                <a:spcPts val="1620"/>
-              </a:lnSpc>
-              <a:spcAft>
-                <a:spcPts val="300"/>
-              </a:spcAft>
-              <a:buSzPct val="100000"/>
-              <a:buChar char="•"/>
-            </a:pPr>
-            <a:r>
-              <a:rPr lang="en-US" sz="1200" i="1" dirty="0">
-                <a:solidFill>
-                  <a:srgbClr val="2C2C2C"/>
-                </a:solidFill>
-                <a:latin typeface="Verdana" pitchFamily="34" charset="0"/>
-                <a:ea typeface="Verdana" pitchFamily="34" charset="-122"/>
-                <a:cs typeface="Verdana" pitchFamily="34" charset="-120"/>
-              </a:rPr>
-              <a:t>"Anyone want to try?"</a:t>
-            </a:r>
-            <a:pPr algn="l" indent="0" marL="0">
-              <a:lnSpc>
-                <a:spcPts val="1620"/>
-              </a:lnSpc>
-              <a:spcAft>
-                <a:spcPts val="300"/>
-              </a:spcAft>
-              <a:buNone/>
-            </a:pPr>
-            <a:r>
-              <a:rPr lang="en-US" sz="1200" dirty="0">
-                <a:solidFill>
-                  <a:srgbClr val="2C2C2C"/>
-                </a:solidFill>
-                <a:latin typeface="Verdana" pitchFamily="34" charset="0"/>
-                <a:ea typeface="Verdana" pitchFamily="34" charset="-122"/>
-                <a:cs typeface="Verdana" pitchFamily="34" charset="-120"/>
-              </a:rPr>
-              <a:t> Take 2 answers. (Usually 42 with some scratch-out work.)</a:t>
-            </a:r>
-            <a:endParaRPr lang="en-US" sz="1200" dirty="0"/>
-          </a:p>
-          <a:p>
-            <a:pPr algn="l" marL="342900" indent="-342900">
-              <a:lnSpc>
-                <a:spcPts val="1620"/>
-              </a:lnSpc>
-              <a:spcAft>
-                <a:spcPts val="300"/>
-              </a:spcAft>
-              <a:buSzPct val="100000"/>
-              <a:buChar char="•"/>
-            </a:pPr>
-            <a:r>
-              <a:rPr lang="en-US" sz="1200" i="1" dirty="0">
-                <a:solidFill>
-                  <a:srgbClr val="2C2C2C"/>
-                </a:solidFill>
-                <a:latin typeface="Verdana" pitchFamily="34" charset="0"/>
-                <a:ea typeface="Verdana" pitchFamily="34" charset="-122"/>
-                <a:cs typeface="Verdana" pitchFamily="34" charset="-120"/>
-              </a:rPr>
-              <a:t>"What if I told you there's a trick? Watch:"</a:t>
-            </a:r>
-            <a:endParaRPr lang="en-US" sz="1200" dirty="0"/>
-          </a:p>
-        </p:txBody>
-      </p:sp>
-      <p:sp>
-        <p:nvSpPr>
-          <p:cNvPr id="9" name="Text 7"/>
-          <p:cNvSpPr/>
-          <p:nvPr/>
-        </p:nvSpPr>
-        <p:spPr>
-          <a:xfrm>
-            <a:off x="406301" y="2330202"/>
-            <a:ext cx="8331398" cy="1126778"/>
-          </a:xfrm>
-          <a:prstGeom prst="rect">
-            <a:avLst/>
-          </a:prstGeom>
-          <a:solidFill>
-            <a:srgbClr val="FFFFFF"/>
-          </a:solidFill>
-          <a:ln/>
-        </p:spPr>
-        <p:txBody>
-          <a:bodyPr wrap="square" rtlCol="0" anchor="ctr"/>
-          <a:lstStyle/>
-          <a:p>
-            <a:pPr indent="0" marL="0">
-              <a:buNone/>
-            </a:pPr>
-            <a:endParaRPr lang="en-US" dirty="0"/>
-          </a:p>
-        </p:txBody>
-      </p:sp>
-      <p:sp>
-        <p:nvSpPr>
-          <p:cNvPr id="10" name="Shape 8"/>
-          <p:cNvSpPr/>
-          <p:nvPr/>
-        </p:nvSpPr>
-        <p:spPr>
-          <a:xfrm>
-            <a:off x="430113" y="2330202"/>
-            <a:ext cx="0" cy="1126778"/>
-          </a:xfrm>
-          <a:prstGeom prst="line">
-            <a:avLst/>
-          </a:prstGeom>
-          <a:noFill/>
-          <a:ln w="47625">
-            <a:solidFill>
-              <a:srgbClr val="87A96B"/>
-            </a:solidFill>
-            <a:prstDash val="solid"/>
-          </a:ln>
-        </p:spPr>
-      </p:sp>
-      <p:sp>
-        <p:nvSpPr>
-          <p:cNvPr id="11" name="Text 9"/>
-          <p:cNvSpPr/>
-          <p:nvPr/>
-        </p:nvSpPr>
-        <p:spPr>
-          <a:xfrm>
-            <a:off x="631627" y="2457152"/>
-            <a:ext cx="8086939" cy="174575"/>
-          </a:xfrm>
-          <a:prstGeom prst="rect">
-            <a:avLst/>
-          </a:prstGeom>
-          <a:noFill/>
-          <a:ln/>
-        </p:spPr>
-        <p:txBody>
-          <a:bodyPr wrap="square" lIns="0" tIns="0" rIns="0" bIns="0" rtlCol="0" anchor="t"/>
-          <a:lstStyle/>
-          <a:p>
-            <a:pPr algn="l" indent="0" marL="0">
-              <a:lnSpc>
-                <a:spcPts val="1375"/>
-              </a:lnSpc>
-              <a:buNone/>
-            </a:pPr>
-            <a:r>
-              <a:rPr lang="en-US" sz="1100" dirty="0">
-                <a:solidFill>
-                  <a:srgbClr val="2C2C2C"/>
-                </a:solidFill>
-                <a:latin typeface="Courier New" pitchFamily="34" charset="0"/>
-                <a:ea typeface="Courier New" pitchFamily="34" charset="-122"/>
-                <a:cs typeface="Courier New" pitchFamily="34" charset="-120"/>
-              </a:rPr>
-              <a:t>9 is the same as 10 - 1.</a:t>
-            </a:r>
-            <a:endParaRPr lang="en-US" sz="1100" dirty="0"/>
-          </a:p>
-        </p:txBody>
-      </p:sp>
-      <p:sp>
-        <p:nvSpPr>
-          <p:cNvPr id="12" name="Text 10"/>
-          <p:cNvSpPr/>
-          <p:nvPr/>
-        </p:nvSpPr>
-        <p:spPr>
-          <a:xfrm>
-            <a:off x="631627" y="2631728"/>
-            <a:ext cx="8086939" cy="174575"/>
-          </a:xfrm>
-          <a:prstGeom prst="rect">
-            <a:avLst/>
-          </a:prstGeom>
-          <a:noFill/>
-          <a:ln/>
-        </p:spPr>
-        <p:txBody>
-          <a:bodyPr wrap="square" lIns="0" tIns="0" rIns="0" bIns="0" rtlCol="0" anchor="t"/>
-          <a:lstStyle/>
-          <a:p>
-            <a:pPr algn="l" indent="0" marL="0">
-              <a:lnSpc>
-                <a:spcPts val="1375"/>
-              </a:lnSpc>
-              <a:buNone/>
-            </a:pPr>
-            <a:r>
-              <a:rPr lang="en-US" sz="1100" dirty="0">
-                <a:solidFill>
-                  <a:srgbClr val="2C2C2C"/>
-                </a:solidFill>
-                <a:latin typeface="Courier New" pitchFamily="34" charset="0"/>
-                <a:ea typeface="Courier New" pitchFamily="34" charset="-122"/>
-                <a:cs typeface="Courier New" pitchFamily="34" charset="-120"/>
-              </a:rPr>
-              <a:t>So 33 + 9 is the same as 33 + 10 - 1.</a:t>
-            </a:r>
-            <a:endParaRPr lang="en-US" sz="1100" dirty="0"/>
-          </a:p>
-        </p:txBody>
-      </p:sp>
-      <p:sp>
-        <p:nvSpPr>
-          <p:cNvPr id="13" name="Text 11"/>
-          <p:cNvSpPr/>
-          <p:nvPr/>
-        </p:nvSpPr>
-        <p:spPr>
-          <a:xfrm>
-            <a:off x="631627" y="2806303"/>
-            <a:ext cx="8086939" cy="174575"/>
-          </a:xfrm>
-          <a:prstGeom prst="rect">
-            <a:avLst/>
-          </a:prstGeom>
-          <a:noFill/>
-          <a:ln/>
-        </p:spPr>
-        <p:txBody>
-          <a:bodyPr wrap="square" lIns="0" tIns="0" rIns="0" bIns="0" rtlCol="0" anchor="t"/>
-          <a:lstStyle/>
-          <a:p>
-            <a:pPr algn="l" indent="0" marL="0">
-              <a:lnSpc>
-                <a:spcPts val="1375"/>
-              </a:lnSpc>
-              <a:buNone/>
-            </a:pPr>
-            <a:r>
-              <a:rPr lang="en-US" sz="1100" dirty="0">
-                <a:solidFill>
-                  <a:srgbClr val="2C2C2C"/>
-                </a:solidFill>
-                <a:latin typeface="Courier New" pitchFamily="34" charset="0"/>
-                <a:ea typeface="Courier New" pitchFamily="34" charset="-122"/>
-                <a:cs typeface="Courier New" pitchFamily="34" charset="-120"/>
-              </a:rPr>
-              <a:t>33 + 10 = 43.</a:t>
-            </a:r>
-            <a:endParaRPr lang="en-US" sz="1100" dirty="0"/>
-          </a:p>
-        </p:txBody>
-      </p:sp>
-      <p:sp>
-        <p:nvSpPr>
-          <p:cNvPr id="14" name="Text 12"/>
-          <p:cNvSpPr/>
-          <p:nvPr/>
-        </p:nvSpPr>
-        <p:spPr>
-          <a:xfrm>
-            <a:off x="631627" y="2980879"/>
-            <a:ext cx="8086939" cy="174575"/>
-          </a:xfrm>
-          <a:prstGeom prst="rect">
-            <a:avLst/>
-          </a:prstGeom>
-          <a:noFill/>
-          <a:ln/>
-        </p:spPr>
-        <p:txBody>
-          <a:bodyPr wrap="square" lIns="0" tIns="0" rIns="0" bIns="0" rtlCol="0" anchor="t"/>
-          <a:lstStyle/>
-          <a:p>
-            <a:pPr algn="l" indent="0" marL="0">
-              <a:lnSpc>
-                <a:spcPts val="1375"/>
-              </a:lnSpc>
-              <a:buNone/>
-            </a:pPr>
-            <a:r>
-              <a:rPr lang="en-US" sz="1100" dirty="0">
-                <a:solidFill>
-                  <a:srgbClr val="2C2C2C"/>
-                </a:solidFill>
-                <a:latin typeface="Courier New" pitchFamily="34" charset="0"/>
-                <a:ea typeface="Courier New" pitchFamily="34" charset="-122"/>
-                <a:cs typeface="Courier New" pitchFamily="34" charset="-120"/>
-              </a:rPr>
-              <a:t>43 - 1 = 42.</a:t>
-            </a:r>
-            <a:endParaRPr lang="en-US" sz="1100" dirty="0"/>
-          </a:p>
-        </p:txBody>
-      </p:sp>
-      <p:sp>
-        <p:nvSpPr>
-          <p:cNvPr id="15" name="Text 13"/>
-          <p:cNvSpPr/>
-          <p:nvPr/>
-        </p:nvSpPr>
-        <p:spPr>
-          <a:xfrm>
-            <a:off x="631627" y="3155454"/>
-            <a:ext cx="8086939" cy="174575"/>
-          </a:xfrm>
-          <a:prstGeom prst="rect">
-            <a:avLst/>
-          </a:prstGeom>
-          <a:noFill/>
-          <a:ln/>
-        </p:spPr>
-        <p:txBody>
-          <a:bodyPr wrap="square" lIns="0" tIns="0" rIns="0" bIns="0" rtlCol="0" anchor="t"/>
-          <a:lstStyle/>
-          <a:p>
-            <a:pPr algn="l" indent="0" marL="0">
-              <a:lnSpc>
-                <a:spcPts val="1375"/>
-              </a:lnSpc>
-              <a:buNone/>
-            </a:pPr>
-            <a:r>
-              <a:rPr lang="en-US" sz="1100" dirty="0">
-                <a:solidFill>
-                  <a:srgbClr val="2C2C2C"/>
-                </a:solidFill>
-                <a:latin typeface="Courier New" pitchFamily="34" charset="0"/>
-                <a:ea typeface="Courier New" pitchFamily="34" charset="-122"/>
-                <a:cs typeface="Courier New" pitchFamily="34" charset="-120"/>
-              </a:rPr>
-              <a:t>Done!</a:t>
-            </a:r>
-            <a:endParaRPr lang="en-US" sz="1100" dirty="0"/>
-          </a:p>
-        </p:txBody>
-      </p:sp>
-      <p:sp>
-        <p:nvSpPr>
-          <p:cNvPr id="16" name="Text 14"/>
-          <p:cNvSpPr/>
-          <p:nvPr/>
-        </p:nvSpPr>
-        <p:spPr>
-          <a:xfrm>
-            <a:off x="406301" y="3545830"/>
-            <a:ext cx="8498026" cy="213271"/>
-          </a:xfrm>
-          <a:prstGeom prst="rect">
-            <a:avLst/>
-          </a:prstGeom>
-          <a:noFill/>
-          <a:ln/>
-        </p:spPr>
-        <p:txBody>
-          <a:bodyPr wrap="square" lIns="0" tIns="0" rIns="0" bIns="0" rtlCol="0" anchor="t"/>
-          <a:lstStyle/>
-          <a:p>
-            <a:pPr algn="l" indent="0" marL="0">
-              <a:lnSpc>
-                <a:spcPts val="1680"/>
-              </a:lnSpc>
-              <a:spcBef>
-                <a:spcPts val="300"/>
-              </a:spcBef>
-              <a:spcAft>
-                <a:spcPts val="300"/>
-              </a:spcAft>
-              <a:buNone/>
-            </a:pPr>
-            <a:r>
-              <a:rPr lang="en-US" sz="1200" i="1" dirty="0">
-                <a:solidFill>
-                  <a:srgbClr val="2C2C2C"/>
-                </a:solidFill>
-                <a:latin typeface="Verdana" pitchFamily="34" charset="0"/>
-                <a:ea typeface="Verdana" pitchFamily="34" charset="-122"/>
-                <a:cs typeface="Verdana" pitchFamily="34" charset="-120"/>
-              </a:rPr>
-              <a:t>"Add 10, take 1 away. Easy."</a:t>
-            </a:r>
-            <a:endParaRPr lang="en-US" sz="1200" dirty="0"/>
-          </a:p>
-        </p:txBody>
-      </p:sp>
-      <p:sp>
-        <p:nvSpPr>
-          <p:cNvPr id="17" name="Text 15"/>
-          <p:cNvSpPr/>
-          <p:nvPr/>
-        </p:nvSpPr>
-        <p:spPr>
-          <a:xfrm>
-            <a:off x="406301" y="3835301"/>
-            <a:ext cx="8498026" cy="213271"/>
-          </a:xfrm>
-          <a:prstGeom prst="rect">
-            <a:avLst/>
-          </a:prstGeom>
-          <a:noFill/>
-          <a:ln/>
-        </p:spPr>
-        <p:txBody>
-          <a:bodyPr wrap="square" lIns="0" tIns="0" rIns="0" bIns="0" rtlCol="0" anchor="t"/>
-          <a:lstStyle/>
-          <a:p>
-            <a:pPr algn="l" indent="0" marL="0">
-              <a:lnSpc>
-                <a:spcPts val="1680"/>
-              </a:lnSpc>
-              <a:spcBef>
-                <a:spcPts val="300"/>
-              </a:spcBef>
-              <a:spcAft>
-                <a:spcPts val="300"/>
-              </a:spcAft>
-              <a:buNone/>
-            </a:pPr>
-            <a:r>
-              <a:rPr lang="en-US" sz="1200" dirty="0">
-                <a:solidFill>
-                  <a:srgbClr val="2C2C2C"/>
-                </a:solidFill>
-                <a:latin typeface="Verdana" pitchFamily="34" charset="0"/>
-                <a:ea typeface="Verdana" pitchFamily="34" charset="-122"/>
-                <a:cs typeface="Verdana" pitchFamily="34" charset="-120"/>
-              </a:rPr>
-              <a:t>More examples: – 47 + 9 = 47 + 10 - 1 = 56 – 64 + 9 = 64 + 10 - 1 = 73 – 28 + 9 = 28 + 10 - 1 = 37</a:t>
-            </a:r>
-            <a:endParaRPr lang="en-US" sz="1200" dirty="0"/>
-          </a:p>
-        </p:txBody>
-      </p:sp>
-      <p:sp>
-        <p:nvSpPr>
-          <p:cNvPr id="18" name="Text 16"/>
           <p:cNvSpPr/>
           <p:nvPr/>
         </p:nvSpPr>
@@ -4045,7 +4605,7 @@
                 <a:ea typeface="Georgia" pitchFamily="34" charset="-122"/>
                 <a:cs typeface="Georgia" pitchFamily="34" charset="-120"/>
               </a:rPr>
-              <a:t>Drill (15 min)</a:t>
+              <a:t>Story / trick (10 min)</a:t>
             </a:r>
             <a:endParaRPr lang="en-US" sz="1800" dirty="0"/>
           </a:p>
@@ -4059,8 +4619,8 @@
         </p:nvSpPr>
         <p:spPr>
           <a:xfrm>
-            <a:off x="406301" y="870942"/>
-            <a:ext cx="8498026" cy="213271"/>
+            <a:off x="634901" y="883593"/>
+            <a:ext cx="8102798" cy="281880"/>
           </a:xfrm>
           <a:prstGeom prst="rect">
             <a:avLst/>
@@ -4072,17 +4632,15 @@
           <a:bodyPr wrap="square" lIns="0" tIns="0" rIns="0" bIns="0" rtlCol="0" anchor="t"/>
           <a:lstStyle/>
           <a:p>
-            <a:pPr algn="l" indent="0" marL="0">
-              <a:lnSpc>
-                <a:spcPts val="1680"/>
-              </a:lnSpc>
-              <a:spcBef>
-                <a:spcPts val="300"/>
-              </a:spcBef>
+            <a:pPr algn="l" marL="342900" indent="-342900">
+              <a:lnSpc>
+                <a:spcPts val="1620"/>
+              </a:lnSpc>
               <a:spcAft>
                 <a:spcPts val="300"/>
               </a:spcAft>
-              <a:buNone/>
+              <a:buSzPct val="100000"/>
+              <a:buChar char="•"/>
             </a:pPr>
             <a:r>
               <a:rPr lang="en-US" sz="1200" dirty="0">
@@ -4093,7 +4651,7 @@
                 <a:ea typeface="Verdana" pitchFamily="34" charset="-122"/>
                 <a:cs typeface="Verdana" pitchFamily="34" charset="-120"/>
               </a:rPr>
-              <a:t>Worksheet of 20 "+9" problems. Or quick-fire flash cards.</a:t>
+              <a:t>Write on the board:</a:t>
             </a:r>
             <a:endParaRPr lang="en-US" sz="1200" dirty="0"/>
           </a:p>
@@ -4107,13 +4665,66 @@
         </p:nvSpPr>
         <p:spPr>
           <a:xfrm>
-            <a:off x="406301" y="1160413"/>
-            <a:ext cx="8498026" cy="213271"/>
-          </a:xfrm>
-          <a:prstGeom prst="rect">
+            <a:off x="406301" y="1266974"/>
+            <a:ext cx="8331398" cy="428476"/>
+          </a:xfrm>
+          <a:prstGeom prst="rect">
+            <a:avLst/>
+          </a:prstGeom>
+          <a:solidFill>
+            <a:srgbClr val="FFFFFF"/>
+          </a:solidFill>
+          <a:ln/>
+        </p:spPr>
+        <p:txBody>
+          <a:bodyPr wrap="square" rtlCol="0" anchor="ctr"/>
+          <a:lstStyle/>
+          <a:p>
+            <a:pPr indent="0" marL="0">
+              <a:buNone/>
+            </a:pPr>
+            <a:endParaRPr lang="en-US" dirty="0"/>
+          </a:p>
+        </p:txBody>
+      </p:sp>
+      <p:sp>
+        <p:nvSpPr>
+          <p:cNvPr id="6" name="Shape 4"/>
+          <p:cNvSpPr/>
+          <p:nvPr/>
+        </p:nvSpPr>
+        <p:spPr>
+          <a:xfrm>
+            <a:off x="430113" y="1266974"/>
+            <a:ext cx="0" cy="428476"/>
+          </a:xfrm>
+          <a:prstGeom prst="line">
             <a:avLst/>
           </a:prstGeom>
           <a:noFill/>
+          <a:ln w="47625">
+            <a:solidFill>
+              <a:srgbClr val="87A96B"/>
+            </a:solidFill>
+            <a:prstDash val="solid"/>
+          </a:ln>
+        </p:spPr>
+      </p:sp>
+      <p:sp>
+        <p:nvSpPr>
+          <p:cNvPr id="7" name="Text 5"/>
+          <p:cNvSpPr/>
+          <p:nvPr/>
+        </p:nvSpPr>
+        <p:spPr>
+          <a:xfrm>
+            <a:off x="631627" y="1393924"/>
+            <a:ext cx="8086939" cy="174575"/>
+          </a:xfrm>
+          <a:prstGeom prst="rect">
+            <a:avLst/>
+          </a:prstGeom>
+          <a:noFill/>
           <a:ln/>
         </p:spPr>
         <p:txBody>
@@ -4122,34 +4733,28 @@
           <a:p>
             <a:pPr algn="l" indent="0" marL="0">
               <a:lnSpc>
-                <a:spcPts val="1680"/>
-              </a:lnSpc>
-              <a:spcBef>
-                <a:spcPts val="300"/>
-              </a:spcBef>
-              <a:spcAft>
-                <a:spcPts val="300"/>
-              </a:spcAft>
-              <a:buNone/>
-            </a:pPr>
-            <a:r>
-              <a:rPr lang="en-US" sz="1200" dirty="0">
+                <a:spcPts val="1375"/>
+              </a:lnSpc>
+              <a:buNone/>
+            </a:pPr>
+            <a:r>
+              <a:rPr lang="en-US" sz="1100" dirty="0">
                 <a:solidFill>
                   <a:srgbClr val="2C2C2C"/>
                 </a:solidFill>
-                <a:latin typeface="Verdana" pitchFamily="34" charset="0"/>
-                <a:ea typeface="Verdana" pitchFamily="34" charset="-122"/>
-                <a:cs typeface="Verdana" pitchFamily="34" charset="-120"/>
-              </a:rPr>
-              <a:t>After 5 min of individual: paired race — who can do 5 in 30 seconds?</a:t>
-            </a:r>
-            <a:endParaRPr lang="en-US" sz="1200" dirty="0"/>
-          </a:p>
-        </p:txBody>
-      </p:sp>
-      <p:sp>
-        <p:nvSpPr>
-          <p:cNvPr id="6" name="Text 4"/>
+                <a:latin typeface="Courier New" pitchFamily="34" charset="0"/>
+                <a:ea typeface="Courier New" pitchFamily="34" charset="-122"/>
+                <a:cs typeface="Courier New" pitchFamily="34" charset="-120"/>
+              </a:rPr>
+              <a:t>33 + 9 = ?</a:t>
+            </a:r>
+            <a:endParaRPr lang="en-US" sz="1100" dirty="0"/>
+          </a:p>
+        </p:txBody>
+      </p:sp>
+      <p:sp>
+        <p:nvSpPr>
+          <p:cNvPr id="8" name="Text 6"/>
           <p:cNvSpPr/>
           <p:nvPr/>
         </p:nvSpPr>
@@ -4299,7 +4904,7 @@
                 <a:ea typeface="Georgia" pitchFamily="34" charset="-122"/>
                 <a:cs typeface="Georgia" pitchFamily="34" charset="-120"/>
               </a:rPr>
-              <a:t>Speed round (3 min)</a:t>
+              <a:t>Story / trick (10 min) (cont.)</a:t>
             </a:r>
             <a:endParaRPr lang="en-US" sz="1800" dirty="0"/>
           </a:p>
@@ -4313,8 +4918,8 @@
         </p:nvSpPr>
         <p:spPr>
           <a:xfrm>
-            <a:off x="406301" y="870942"/>
-            <a:ext cx="8498026" cy="213271"/>
+            <a:off x="634901" y="883593"/>
+            <a:ext cx="8102798" cy="525661"/>
           </a:xfrm>
           <a:prstGeom prst="rect">
             <a:avLst/>
@@ -4326,20 +4931,18 @@
           <a:bodyPr wrap="square" lIns="0" tIns="0" rIns="0" bIns="0" rtlCol="0" anchor="t"/>
           <a:lstStyle/>
           <a:p>
-            <a:pPr algn="l" indent="0" marL="0">
-              <a:lnSpc>
-                <a:spcPts val="1680"/>
-              </a:lnSpc>
-              <a:spcBef>
-                <a:spcPts val="300"/>
-              </a:spcBef>
+            <a:pPr algn="l" marL="342900" indent="-342900">
+              <a:lnSpc>
+                <a:spcPts val="1620"/>
+              </a:lnSpc>
               <a:spcAft>
                 <a:spcPts val="300"/>
               </a:spcAft>
-              <a:buNone/>
-            </a:pPr>
-            <a:r>
-              <a:rPr lang="en-US" sz="1200" dirty="0">
+              <a:buSzPct val="100000"/>
+              <a:buChar char="•"/>
+            </a:pPr>
+            <a:r>
+              <a:rPr lang="en-US" sz="1200" i="1" dirty="0">
                 <a:solidFill>
                   <a:srgbClr val="2C2C2C"/>
                 </a:solidFill>
@@ -4347,7 +4950,51 @@
                 <a:ea typeface="Verdana" pitchFamily="34" charset="-122"/>
                 <a:cs typeface="Verdana" pitchFamily="34" charset="-120"/>
               </a:rPr>
-              <a:t>Teacher calls "27 plus 9" — class shouts "36!" Mix it up.</a:t>
+              <a:t>"Anyone want to try?"</a:t>
+            </a:r>
+            <a:pPr algn="l" indent="0" marL="0">
+              <a:lnSpc>
+                <a:spcPts val="1620"/>
+              </a:lnSpc>
+              <a:spcAft>
+                <a:spcPts val="300"/>
+              </a:spcAft>
+              <a:buNone/>
+            </a:pPr>
+            <a:r>
+              <a:rPr lang="en-US" sz="1200" dirty="0">
+                <a:solidFill>
+                  <a:srgbClr val="2C2C2C"/>
+                </a:solidFill>
+                <a:latin typeface="Verdana" pitchFamily="34" charset="0"/>
+                <a:ea typeface="Verdana" pitchFamily="34" charset="-122"/>
+                <a:cs typeface="Verdana" pitchFamily="34" charset="-120"/>
+              </a:rPr>
+              <a:t> Take 2 answers. (Usually 42 with some scratch-out work.)</a:t>
+            </a:r>
+            <a:endParaRPr lang="en-US" sz="1200" dirty="0"/>
+          </a:p>
+          <a:p>
+            <a:pPr algn="l" marL="342900" indent="-342900">
+              <a:lnSpc>
+                <a:spcPts val="1620"/>
+              </a:lnSpc>
+              <a:spcAft>
+                <a:spcPts val="300"/>
+              </a:spcAft>
+              <a:buSzPct val="100000"/>
+              <a:buChar char="•"/>
+            </a:pPr>
+            <a:r>
+              <a:rPr lang="en-US" sz="1200" i="1" dirty="0">
+                <a:solidFill>
+                  <a:srgbClr val="2C2C2C"/>
+                </a:solidFill>
+                <a:latin typeface="Verdana" pitchFamily="34" charset="0"/>
+                <a:ea typeface="Verdana" pitchFamily="34" charset="-122"/>
+                <a:cs typeface="Verdana" pitchFamily="34" charset="-120"/>
+              </a:rPr>
+              <a:t>"What if I told you there's a trick? Watch:"</a:t>
             </a:r>
             <a:endParaRPr lang="en-US" sz="1200" dirty="0"/>
           </a:p>
@@ -4505,7 +5152,7 @@
                 <a:ea typeface="Georgia" pitchFamily="34" charset="-122"/>
                 <a:cs typeface="Georgia" pitchFamily="34" charset="-120"/>
               </a:rPr>
-              <a:t>Show + chant (2 min)</a:t>
+              <a:t>Story / trick (10 min) (cont.)</a:t>
             </a:r>
             <a:endParaRPr lang="en-US" sz="1800" dirty="0"/>
           </a:p>
@@ -4519,7 +5166,270 @@
         </p:nvSpPr>
         <p:spPr>
           <a:xfrm>
-            <a:off x="406301" y="870942"/>
+            <a:off x="406301" y="883593"/>
+            <a:ext cx="8331398" cy="1126778"/>
+          </a:xfrm>
+          <a:prstGeom prst="rect">
+            <a:avLst/>
+          </a:prstGeom>
+          <a:solidFill>
+            <a:srgbClr val="FFFFFF"/>
+          </a:solidFill>
+          <a:ln/>
+        </p:spPr>
+        <p:txBody>
+          <a:bodyPr wrap="square" rtlCol="0" anchor="ctr"/>
+          <a:lstStyle/>
+          <a:p>
+            <a:pPr indent="0" marL="0">
+              <a:buNone/>
+            </a:pPr>
+            <a:endParaRPr lang="en-US" dirty="0"/>
+          </a:p>
+        </p:txBody>
+      </p:sp>
+      <p:sp>
+        <p:nvSpPr>
+          <p:cNvPr id="5" name="Shape 3"/>
+          <p:cNvSpPr/>
+          <p:nvPr/>
+        </p:nvSpPr>
+        <p:spPr>
+          <a:xfrm>
+            <a:off x="430113" y="883593"/>
+            <a:ext cx="0" cy="1126778"/>
+          </a:xfrm>
+          <a:prstGeom prst="line">
+            <a:avLst/>
+          </a:prstGeom>
+          <a:noFill/>
+          <a:ln w="47625">
+            <a:solidFill>
+              <a:srgbClr val="87A96B"/>
+            </a:solidFill>
+            <a:prstDash val="solid"/>
+          </a:ln>
+        </p:spPr>
+      </p:sp>
+      <p:sp>
+        <p:nvSpPr>
+          <p:cNvPr id="6" name="Text 4"/>
+          <p:cNvSpPr/>
+          <p:nvPr/>
+        </p:nvSpPr>
+        <p:spPr>
+          <a:xfrm>
+            <a:off x="631627" y="1010543"/>
+            <a:ext cx="8086939" cy="174575"/>
+          </a:xfrm>
+          <a:prstGeom prst="rect">
+            <a:avLst/>
+          </a:prstGeom>
+          <a:noFill/>
+          <a:ln/>
+        </p:spPr>
+        <p:txBody>
+          <a:bodyPr wrap="square" lIns="0" tIns="0" rIns="0" bIns="0" rtlCol="0" anchor="t"/>
+          <a:lstStyle/>
+          <a:p>
+            <a:pPr algn="l" indent="0" marL="0">
+              <a:lnSpc>
+                <a:spcPts val="1375"/>
+              </a:lnSpc>
+              <a:buNone/>
+            </a:pPr>
+            <a:r>
+              <a:rPr lang="en-US" sz="1100" dirty="0">
+                <a:solidFill>
+                  <a:srgbClr val="2C2C2C"/>
+                </a:solidFill>
+                <a:latin typeface="Courier New" pitchFamily="34" charset="0"/>
+                <a:ea typeface="Courier New" pitchFamily="34" charset="-122"/>
+                <a:cs typeface="Courier New" pitchFamily="34" charset="-120"/>
+              </a:rPr>
+              <a:t>9 is the same as 10 - 1.</a:t>
+            </a:r>
+            <a:endParaRPr lang="en-US" sz="1100" dirty="0"/>
+          </a:p>
+        </p:txBody>
+      </p:sp>
+      <p:sp>
+        <p:nvSpPr>
+          <p:cNvPr id="7" name="Text 5"/>
+          <p:cNvSpPr/>
+          <p:nvPr/>
+        </p:nvSpPr>
+        <p:spPr>
+          <a:xfrm>
+            <a:off x="631627" y="1185118"/>
+            <a:ext cx="8086939" cy="174575"/>
+          </a:xfrm>
+          <a:prstGeom prst="rect">
+            <a:avLst/>
+          </a:prstGeom>
+          <a:noFill/>
+          <a:ln/>
+        </p:spPr>
+        <p:txBody>
+          <a:bodyPr wrap="square" lIns="0" tIns="0" rIns="0" bIns="0" rtlCol="0" anchor="t"/>
+          <a:lstStyle/>
+          <a:p>
+            <a:pPr algn="l" indent="0" marL="0">
+              <a:lnSpc>
+                <a:spcPts val="1375"/>
+              </a:lnSpc>
+              <a:buNone/>
+            </a:pPr>
+            <a:r>
+              <a:rPr lang="en-US" sz="1100" dirty="0">
+                <a:solidFill>
+                  <a:srgbClr val="2C2C2C"/>
+                </a:solidFill>
+                <a:latin typeface="Courier New" pitchFamily="34" charset="0"/>
+                <a:ea typeface="Courier New" pitchFamily="34" charset="-122"/>
+                <a:cs typeface="Courier New" pitchFamily="34" charset="-120"/>
+              </a:rPr>
+              <a:t>So 33 + 9 is the same as 33 + 10 - 1.</a:t>
+            </a:r>
+            <a:endParaRPr lang="en-US" sz="1100" dirty="0"/>
+          </a:p>
+        </p:txBody>
+      </p:sp>
+      <p:sp>
+        <p:nvSpPr>
+          <p:cNvPr id="8" name="Text 6"/>
+          <p:cNvSpPr/>
+          <p:nvPr/>
+        </p:nvSpPr>
+        <p:spPr>
+          <a:xfrm>
+            <a:off x="631627" y="1359694"/>
+            <a:ext cx="8086939" cy="174575"/>
+          </a:xfrm>
+          <a:prstGeom prst="rect">
+            <a:avLst/>
+          </a:prstGeom>
+          <a:noFill/>
+          <a:ln/>
+        </p:spPr>
+        <p:txBody>
+          <a:bodyPr wrap="square" lIns="0" tIns="0" rIns="0" bIns="0" rtlCol="0" anchor="t"/>
+          <a:lstStyle/>
+          <a:p>
+            <a:pPr algn="l" indent="0" marL="0">
+              <a:lnSpc>
+                <a:spcPts val="1375"/>
+              </a:lnSpc>
+              <a:buNone/>
+            </a:pPr>
+            <a:r>
+              <a:rPr lang="en-US" sz="1100" dirty="0">
+                <a:solidFill>
+                  <a:srgbClr val="2C2C2C"/>
+                </a:solidFill>
+                <a:latin typeface="Courier New" pitchFamily="34" charset="0"/>
+                <a:ea typeface="Courier New" pitchFamily="34" charset="-122"/>
+                <a:cs typeface="Courier New" pitchFamily="34" charset="-120"/>
+              </a:rPr>
+              <a:t>33 + 10 = 43.</a:t>
+            </a:r>
+            <a:endParaRPr lang="en-US" sz="1100" dirty="0"/>
+          </a:p>
+        </p:txBody>
+      </p:sp>
+      <p:sp>
+        <p:nvSpPr>
+          <p:cNvPr id="9" name="Text 7"/>
+          <p:cNvSpPr/>
+          <p:nvPr/>
+        </p:nvSpPr>
+        <p:spPr>
+          <a:xfrm>
+            <a:off x="631627" y="1534269"/>
+            <a:ext cx="8086939" cy="174575"/>
+          </a:xfrm>
+          <a:prstGeom prst="rect">
+            <a:avLst/>
+          </a:prstGeom>
+          <a:noFill/>
+          <a:ln/>
+        </p:spPr>
+        <p:txBody>
+          <a:bodyPr wrap="square" lIns="0" tIns="0" rIns="0" bIns="0" rtlCol="0" anchor="t"/>
+          <a:lstStyle/>
+          <a:p>
+            <a:pPr algn="l" indent="0" marL="0">
+              <a:lnSpc>
+                <a:spcPts val="1375"/>
+              </a:lnSpc>
+              <a:buNone/>
+            </a:pPr>
+            <a:r>
+              <a:rPr lang="en-US" sz="1100" dirty="0">
+                <a:solidFill>
+                  <a:srgbClr val="2C2C2C"/>
+                </a:solidFill>
+                <a:latin typeface="Courier New" pitchFamily="34" charset="0"/>
+                <a:ea typeface="Courier New" pitchFamily="34" charset="-122"/>
+                <a:cs typeface="Courier New" pitchFamily="34" charset="-120"/>
+              </a:rPr>
+              <a:t>43 - 1 = 42.</a:t>
+            </a:r>
+            <a:endParaRPr lang="en-US" sz="1100" dirty="0"/>
+          </a:p>
+        </p:txBody>
+      </p:sp>
+      <p:sp>
+        <p:nvSpPr>
+          <p:cNvPr id="10" name="Text 8"/>
+          <p:cNvSpPr/>
+          <p:nvPr/>
+        </p:nvSpPr>
+        <p:spPr>
+          <a:xfrm>
+            <a:off x="631627" y="1708845"/>
+            <a:ext cx="8086939" cy="174575"/>
+          </a:xfrm>
+          <a:prstGeom prst="rect">
+            <a:avLst/>
+          </a:prstGeom>
+          <a:noFill/>
+          <a:ln/>
+        </p:spPr>
+        <p:txBody>
+          <a:bodyPr wrap="square" lIns="0" tIns="0" rIns="0" bIns="0" rtlCol="0" anchor="t"/>
+          <a:lstStyle/>
+          <a:p>
+            <a:pPr algn="l" indent="0" marL="0">
+              <a:lnSpc>
+                <a:spcPts val="1375"/>
+              </a:lnSpc>
+              <a:buNone/>
+            </a:pPr>
+            <a:r>
+              <a:rPr lang="en-US" sz="1100" dirty="0">
+                <a:solidFill>
+                  <a:srgbClr val="2C2C2C"/>
+                </a:solidFill>
+                <a:latin typeface="Courier New" pitchFamily="34" charset="0"/>
+                <a:ea typeface="Courier New" pitchFamily="34" charset="-122"/>
+                <a:cs typeface="Courier New" pitchFamily="34" charset="-120"/>
+              </a:rPr>
+              <a:t>Done!</a:t>
+            </a:r>
+            <a:endParaRPr lang="en-US" sz="1100" dirty="0"/>
+          </a:p>
+        </p:txBody>
+      </p:sp>
+      <p:sp>
+        <p:nvSpPr>
+          <p:cNvPr id="11" name="Text 9"/>
+          <p:cNvSpPr/>
+          <p:nvPr/>
+        </p:nvSpPr>
+        <p:spPr>
+          <a:xfrm>
+            <a:off x="406301" y="2099221"/>
             <a:ext cx="8498026" cy="213271"/>
           </a:xfrm>
           <a:prstGeom prst="rect">
@@ -4545,7 +5455,7 @@
               <a:buNone/>
             </a:pPr>
             <a:r>
-              <a:rPr lang="en-US" sz="1200" dirty="0">
+              <a:rPr lang="en-US" sz="1200" i="1" dirty="0">
                 <a:solidFill>
                   <a:srgbClr val="2C2C2C"/>
                 </a:solidFill>
@@ -4553,7 +5463,7 @@
                 <a:ea typeface="Verdana" pitchFamily="34" charset="-122"/>
                 <a:cs typeface="Verdana" pitchFamily="34" charset="-120"/>
               </a:rPr>
-              <a:t>Close.</a:t>
+              <a:t>"Add 10, take 1 away. Easy."</a:t>
             </a:r>
             <a:endParaRPr lang="en-US" sz="1200" dirty="0"/>
           </a:p>
@@ -4561,7 +5471,7 @@
       </p:sp>
       <p:sp>
         <p:nvSpPr>
-          <p:cNvPr id="5" name="Text 3"/>
+          <p:cNvPr id="12" name="Text 10"/>
           <p:cNvSpPr/>
           <p:nvPr/>
         </p:nvSpPr>
@@ -4711,7 +5621,7 @@
                 <a:ea typeface="Georgia" pitchFamily="34" charset="-122"/>
                 <a:cs typeface="Georgia" pitchFamily="34" charset="-120"/>
               </a:rPr>
-              <a:t>Homework</a:t>
+              <a:t>Story / trick (10 min) (cont.)</a:t>
             </a:r>
             <a:endParaRPr lang="en-US" sz="1800" dirty="0"/>
           </a:p>
@@ -4726,7 +5636,7 @@
         <p:spPr>
           <a:xfrm>
             <a:off x="406301" y="870942"/>
-            <a:ext cx="8498026" cy="426541"/>
+            <a:ext cx="8498026" cy="213271"/>
           </a:xfrm>
           <a:prstGeom prst="rect">
             <a:avLst/>
@@ -4759,7 +5669,7 @@
                 <a:ea typeface="Verdana" pitchFamily="34" charset="-122"/>
                 <a:cs typeface="Verdana" pitchFamily="34" charset="-120"/>
               </a:rPr>
-              <a:t>– Find ANY 5 2-digit numbers (look at your house number, car plate, telephone digits). Add 9 to each in your head.</a:t>
+              <a:t>More examples:</a:t>
             </a:r>
             <a:endParaRPr lang="en-US" sz="1200" dirty="0"/>
           </a:p>
@@ -4768,6 +5678,100 @@
       <p:sp>
         <p:nvSpPr>
           <p:cNvPr id="5" name="Text 3"/>
+          <p:cNvSpPr/>
+          <p:nvPr/>
+        </p:nvSpPr>
+        <p:spPr>
+          <a:xfrm>
+            <a:off x="634901" y="1173063"/>
+            <a:ext cx="8102798" cy="769441"/>
+          </a:xfrm>
+          <a:prstGeom prst="rect">
+            <a:avLst/>
+          </a:prstGeom>
+          <a:noFill/>
+          <a:ln/>
+        </p:spPr>
+        <p:txBody>
+          <a:bodyPr wrap="square" lIns="0" tIns="0" rIns="0" bIns="0" rtlCol="0" anchor="t"/>
+          <a:lstStyle/>
+          <a:p>
+            <a:pPr algn="l" marL="342900" indent="-342900">
+              <a:lnSpc>
+                <a:spcPts val="1620"/>
+              </a:lnSpc>
+              <a:spcAft>
+                <a:spcPts val="300"/>
+              </a:spcAft>
+              <a:buSzPct val="100000"/>
+              <a:buChar char="•"/>
+            </a:pPr>
+            <a:r>
+              <a:rPr lang="en-US" sz="1200" dirty="0">
+                <a:solidFill>
+                  <a:srgbClr val="2C2C2C"/>
+                </a:solidFill>
+                <a:latin typeface="Verdana" pitchFamily="34" charset="0"/>
+                <a:ea typeface="Verdana" pitchFamily="34" charset="-122"/>
+                <a:cs typeface="Verdana" pitchFamily="34" charset="-120"/>
+              </a:rPr>
+              <a:t>47 + 9 = 47 + 10 - 1 = 56</a:t>
+            </a:r>
+            <a:endParaRPr lang="en-US" sz="1200" dirty="0"/>
+          </a:p>
+          <a:p>
+            <a:pPr algn="l" marL="342900" indent="-342900">
+              <a:lnSpc>
+                <a:spcPts val="1620"/>
+              </a:lnSpc>
+              <a:spcAft>
+                <a:spcPts val="300"/>
+              </a:spcAft>
+              <a:buSzPct val="100000"/>
+              <a:buChar char="•"/>
+            </a:pPr>
+            <a:r>
+              <a:rPr lang="en-US" sz="1200" dirty="0">
+                <a:solidFill>
+                  <a:srgbClr val="2C2C2C"/>
+                </a:solidFill>
+                <a:latin typeface="Verdana" pitchFamily="34" charset="0"/>
+                <a:ea typeface="Verdana" pitchFamily="34" charset="-122"/>
+                <a:cs typeface="Verdana" pitchFamily="34" charset="-120"/>
+              </a:rPr>
+              <a:t>64 + 9 = 64 + 10 - 1 = 73</a:t>
+            </a:r>
+            <a:endParaRPr lang="en-US" sz="1200" dirty="0"/>
+          </a:p>
+          <a:p>
+            <a:pPr algn="l" marL="342900" indent="-342900">
+              <a:lnSpc>
+                <a:spcPts val="1620"/>
+              </a:lnSpc>
+              <a:spcAft>
+                <a:spcPts val="300"/>
+              </a:spcAft>
+              <a:buSzPct val="100000"/>
+              <a:buChar char="•"/>
+            </a:pPr>
+            <a:r>
+              <a:rPr lang="en-US" sz="1200" dirty="0">
+                <a:solidFill>
+                  <a:srgbClr val="2C2C2C"/>
+                </a:solidFill>
+                <a:latin typeface="Verdana" pitchFamily="34" charset="0"/>
+                <a:ea typeface="Verdana" pitchFamily="34" charset="-122"/>
+                <a:cs typeface="Verdana" pitchFamily="34" charset="-120"/>
+              </a:rPr>
+              <a:t>28 + 9 = 28 + 10 - 1 = 37</a:t>
+            </a:r>
+            <a:endParaRPr lang="en-US" sz="1200" dirty="0"/>
+          </a:p>
+        </p:txBody>
+      </p:sp>
+      <p:sp>
+        <p:nvSpPr>
+          <p:cNvPr id="6" name="Text 4"/>
           <p:cNvSpPr/>
           <p:nvPr/>
         </p:nvSpPr>
